--- a/DAEN489S26/week11_slides.pptx
+++ b/DAEN489S26/week11_slides.pptx
@@ -5,23 +5,37 @@
     <p:sldMasterId id="2147483660" r:id="rId1"/>
   </p:sldMasterIdLst>
   <p:notesMasterIdLst>
-    <p:notesMasterId r:id="rId16"/>
+    <p:notesMasterId r:id="rId30"/>
   </p:notesMasterIdLst>
   <p:sldIdLst>
     <p:sldId id="256" r:id="rId2"/>
     <p:sldId id="293" r:id="rId3"/>
-    <p:sldId id="306" r:id="rId4"/>
-    <p:sldId id="307" r:id="rId5"/>
-    <p:sldId id="316" r:id="rId6"/>
-    <p:sldId id="308" r:id="rId7"/>
-    <p:sldId id="309" r:id="rId8"/>
-    <p:sldId id="310" r:id="rId9"/>
-    <p:sldId id="311" r:id="rId10"/>
-    <p:sldId id="312" r:id="rId11"/>
-    <p:sldId id="313" r:id="rId12"/>
-    <p:sldId id="315" r:id="rId13"/>
-    <p:sldId id="314" r:id="rId14"/>
-    <p:sldId id="305" r:id="rId15"/>
+    <p:sldId id="317" r:id="rId4"/>
+    <p:sldId id="318" r:id="rId5"/>
+    <p:sldId id="308" r:id="rId6"/>
+    <p:sldId id="331" r:id="rId7"/>
+    <p:sldId id="330" r:id="rId8"/>
+    <p:sldId id="319" r:id="rId9"/>
+    <p:sldId id="332" r:id="rId10"/>
+    <p:sldId id="320" r:id="rId11"/>
+    <p:sldId id="321" r:id="rId12"/>
+    <p:sldId id="322" r:id="rId13"/>
+    <p:sldId id="323" r:id="rId14"/>
+    <p:sldId id="324" r:id="rId15"/>
+    <p:sldId id="325" r:id="rId16"/>
+    <p:sldId id="326" r:id="rId17"/>
+    <p:sldId id="327" r:id="rId18"/>
+    <p:sldId id="328" r:id="rId19"/>
+    <p:sldId id="329" r:id="rId20"/>
+    <p:sldId id="309" r:id="rId21"/>
+    <p:sldId id="310" r:id="rId22"/>
+    <p:sldId id="311" r:id="rId23"/>
+    <p:sldId id="312" r:id="rId24"/>
+    <p:sldId id="313" r:id="rId25"/>
+    <p:sldId id="315" r:id="rId26"/>
+    <p:sldId id="314" r:id="rId27"/>
+    <p:sldId id="305" r:id="rId28"/>
+    <p:sldId id="333" r:id="rId29"/>
   </p:sldIdLst>
   <p:sldSz cx="9144000" cy="6858000" type="screen4x3"/>
   <p:notesSz cx="6858000" cy="9144000"/>
@@ -121,6 +135,66 @@
     </a:lvl9pPr>
   </p:defaultTextStyle>
   <p:extLst>
+    <p:ext uri="{521415D9-36F7-43E2-AB2F-B90AF26B5E84}">
+      <p14:sectionLst xmlns:p14="http://schemas.microsoft.com/office/powerpoint/2010/main">
+        <p14:section name="Default Section" id="{B5A1FBEB-8E98-2648-AACA-444C6CF94B58}">
+          <p14:sldIdLst>
+            <p14:sldId id="256"/>
+            <p14:sldId id="293"/>
+          </p14:sldIdLst>
+        </p14:section>
+        <p14:section name="Intro" id="{AAAF4145-0111-8840-BC27-A001451B4C1C}">
+          <p14:sldIdLst>
+            <p14:sldId id="317"/>
+            <p14:sldId id="318"/>
+          </p14:sldIdLst>
+        </p14:section>
+        <p14:section name="Static" id="{726521BA-6FDD-E141-85CC-06ADFED5112F}">
+          <p14:sldIdLst>
+            <p14:sldId id="308"/>
+            <p14:sldId id="331"/>
+            <p14:sldId id="330"/>
+            <p14:sldId id="319"/>
+            <p14:sldId id="332"/>
+            <p14:sldId id="320"/>
+            <p14:sldId id="321"/>
+            <p14:sldId id="322"/>
+            <p14:sldId id="323"/>
+            <p14:sldId id="324"/>
+            <p14:sldId id="325"/>
+            <p14:sldId id="326"/>
+            <p14:sldId id="327"/>
+            <p14:sldId id="328"/>
+            <p14:sldId id="329"/>
+            <p14:sldId id="309"/>
+          </p14:sldIdLst>
+        </p14:section>
+        <p14:section name="Animated" id="{53927C2D-7BF2-7C4A-8F49-AF0199F08B9A}">
+          <p14:sldIdLst>
+            <p14:sldId id="310"/>
+            <p14:sldId id="311"/>
+          </p14:sldIdLst>
+        </p14:section>
+        <p14:section name="Interactive" id="{3B4263D5-AE2C-504D-A27F-EEEB4EBC5B3D}">
+          <p14:sldIdLst>
+            <p14:sldId id="312"/>
+            <p14:sldId id="313"/>
+          </p14:sldIdLst>
+        </p14:section>
+        <p14:section name="Applications" id="{8107A08D-8E25-5A4B-B6E5-4FDF6CDDA291}">
+          <p14:sldIdLst>
+            <p14:sldId id="315"/>
+            <p14:sldId id="314"/>
+          </p14:sldIdLst>
+        </p14:section>
+        <p14:section name="References" id="{80CE1547-8FED-EB40-BEB2-D4CEAADA67FE}">
+          <p14:sldIdLst>
+            <p14:sldId id="305"/>
+            <p14:sldId id="333"/>
+          </p14:sldIdLst>
+        </p14:section>
+      </p14:sectionLst>
+    </p:ext>
     <p:ext uri="{EFAFB233-063F-42B5-8137-9DF3F51BA10A}">
       <p15:sldGuideLst xmlns:p15="http://schemas.microsoft.com/office/powerpoint/2012/main"/>
     </p:ext>
@@ -210,7 +284,7 @@
           <a:p>
             <a:fld id="{704FB6DC-B598-8B49-8FDB-37BE75E655AD}" type="datetimeFigureOut">
               <a:rPr lang="en-US" smtClean="0"/>
-              <a:t>3/30/26</a:t>
+              <a:t>4/1/26</a:t>
             </a:fld>
             <a:endParaRPr lang="en-US"/>
           </a:p>
@@ -608,7 +682,7 @@
           <a:p>
             <a:fld id="{558EA6D9-2D7F-9442-BED1-4D7FFC9A34F4}" type="datetime1">
               <a:rPr lang="en-US" smtClean="0"/>
-              <a:t>3/30/26</a:t>
+              <a:t>4/1/26</a:t>
             </a:fld>
             <a:endParaRPr lang="en-US"/>
           </a:p>
@@ -778,7 +852,7 @@
           <a:p>
             <a:fld id="{2EAE58ED-569E-7141-BEA4-8F66F85D6EA8}" type="datetime1">
               <a:rPr lang="en-US" smtClean="0"/>
-              <a:t>3/30/26</a:t>
+              <a:t>4/1/26</a:t>
             </a:fld>
             <a:endParaRPr lang="en-US"/>
           </a:p>
@@ -1024,7 +1098,7 @@
           <a:p>
             <a:fld id="{A832CD10-D7BB-1A41-A802-BCEB6EE7274C}" type="datetime1">
               <a:rPr lang="en-US" smtClean="0"/>
-              <a:t>3/30/26</a:t>
+              <a:t>4/1/26</a:t>
             </a:fld>
             <a:endParaRPr lang="en-US"/>
           </a:p>
@@ -1266,7 +1340,7 @@
           <a:p>
             <a:fld id="{37563A2C-1A5C-EB4D-A972-6AE3285E62FE}" type="datetime1">
               <a:rPr lang="en-US" smtClean="0"/>
-              <a:t>3/30/26</a:t>
+              <a:t>4/1/26</a:t>
             </a:fld>
             <a:endParaRPr lang="en-US"/>
           </a:p>
@@ -1654,7 +1728,7 @@
           <a:p>
             <a:fld id="{5CC0F2D4-C57D-2449-85CE-67A0F42FDA3B}" type="datetime1">
               <a:rPr lang="en-US" smtClean="0"/>
-              <a:t>3/30/26</a:t>
+              <a:t>4/1/26</a:t>
             </a:fld>
             <a:endParaRPr lang="en-US"/>
           </a:p>
@@ -1772,7 +1846,7 @@
           <a:p>
             <a:fld id="{14165B4F-A2D4-8548-B798-9B676580887F}" type="datetime1">
               <a:rPr lang="en-US" smtClean="0"/>
-              <a:t>3/30/26</a:t>
+              <a:t>4/1/26</a:t>
             </a:fld>
             <a:endParaRPr lang="en-US"/>
           </a:p>
@@ -1867,7 +1941,7 @@
           <a:p>
             <a:fld id="{7623453A-5CCA-2B47-B840-00C815B24B38}" type="datetime1">
               <a:rPr lang="en-US" smtClean="0"/>
-              <a:t>3/30/26</a:t>
+              <a:t>4/1/26</a:t>
             </a:fld>
             <a:endParaRPr lang="en-US"/>
           </a:p>
@@ -2010,38 +2084,37 @@
           <a:p>
             <a:pPr lvl="0"/>
             <a:r>
-              <a:rPr lang="en-US"/>
+              <a:rPr lang="en-US" dirty="0"/>
               <a:t>Click to edit Master text styles</a:t>
             </a:r>
           </a:p>
           <a:p>
             <a:pPr lvl="1"/>
             <a:r>
-              <a:rPr lang="en-US"/>
+              <a:rPr lang="en-US" dirty="0"/>
               <a:t>Second level</a:t>
             </a:r>
           </a:p>
           <a:p>
             <a:pPr lvl="2"/>
             <a:r>
-              <a:rPr lang="en-US"/>
+              <a:rPr lang="en-US" dirty="0"/>
               <a:t>Third level</a:t>
             </a:r>
           </a:p>
           <a:p>
             <a:pPr lvl="3"/>
             <a:r>
-              <a:rPr lang="en-US"/>
+              <a:rPr lang="en-US" dirty="0"/>
               <a:t>Fourth level</a:t>
             </a:r>
           </a:p>
           <a:p>
             <a:pPr lvl="4"/>
             <a:r>
-              <a:rPr lang="en-US"/>
+              <a:rPr lang="en-US" dirty="0"/>
               <a:t>Fifth level</a:t>
             </a:r>
-            <a:endParaRPr lang="en-US" dirty="0"/>
           </a:p>
         </p:txBody>
       </p:sp>
@@ -2080,7 +2153,7 @@
           <a:p>
             <a:fld id="{EE088FA9-E09B-F247-9C69-3141F5729F41}" type="datetime1">
               <a:rPr lang="en-US" smtClean="0"/>
-              <a:t>3/30/26</a:t>
+              <a:t>4/1/26</a:t>
             </a:fld>
             <a:endParaRPr lang="en-US"/>
           </a:p>
@@ -2212,7 +2285,7 @@
         </a:spcBef>
         <a:buFont typeface="Arial" panose="020B0604020202020204" pitchFamily="34" charset="0"/>
         <a:buChar char="•"/>
-        <a:defRPr sz="2200" kern="1200">
+        <a:defRPr sz="2000" kern="1200">
           <a:solidFill>
             <a:schemeClr val="tx1"/>
           </a:solidFill>
@@ -2230,7 +2303,7 @@
         </a:spcBef>
         <a:buFont typeface="Arial" panose="020B0604020202020204" pitchFamily="34" charset="0"/>
         <a:buChar char="•"/>
-        <a:defRPr sz="1800" kern="1200">
+        <a:defRPr sz="2000" kern="1200">
           <a:solidFill>
             <a:schemeClr val="tx1"/>
           </a:solidFill>
@@ -2248,7 +2321,7 @@
         </a:spcBef>
         <a:buFont typeface="Arial" panose="020B0604020202020204" pitchFamily="34" charset="0"/>
         <a:buChar char="•"/>
-        <a:defRPr sz="1800" kern="1200">
+        <a:defRPr sz="2000" kern="1200">
           <a:solidFill>
             <a:schemeClr val="tx1"/>
           </a:solidFill>
@@ -2521,7 +2594,14 @@
           <a:p>
             <a:r>
               <a:rPr lang="en-US" dirty="0"/>
-              <a:t>Reprojecting &amp; I/O</a:t>
+              <a:t>Making Maps</a:t>
+            </a:r>
+            <a:br>
+              <a:rPr lang="en-US" dirty="0"/>
+            </a:br>
+            <a:r>
+              <a:rPr lang="en-US" dirty="0"/>
+              <a:t>and Cartographic Design</a:t>
             </a:r>
           </a:p>
         </p:txBody>
@@ -2614,7 +2694,7 @@
         <p:cNvPr id="1" name="">
           <a:extLst>
             <a:ext uri="{FF2B5EF4-FFF2-40B4-BE49-F238E27FC236}">
-              <a16:creationId xmlns:a16="http://schemas.microsoft.com/office/drawing/2014/main" id="{901F5D6C-A8DA-73B8-2114-F48DD715F174}"/>
+              <a16:creationId xmlns:a16="http://schemas.microsoft.com/office/drawing/2014/main" id="{7163D0E6-CDF2-4016-019F-E6F21966EB02}"/>
             </a:ext>
           </a:extLst>
         </p:cNvPr>
@@ -2631,10 +2711,10 @@
       </p:grpSpPr>
       <p:sp>
         <p:nvSpPr>
-          <p:cNvPr id="5" name="Title 4">
-            <a:extLst>
-              <a:ext uri="{FF2B5EF4-FFF2-40B4-BE49-F238E27FC236}">
-                <a16:creationId xmlns:a16="http://schemas.microsoft.com/office/drawing/2014/main" id="{70359EC1-5698-4292-410B-7F0358B35B0C}"/>
+          <p:cNvPr id="2" name="Title 1">
+            <a:extLst>
+              <a:ext uri="{FF2B5EF4-FFF2-40B4-BE49-F238E27FC236}">
+                <a16:creationId xmlns:a16="http://schemas.microsoft.com/office/drawing/2014/main" id="{6F3459E1-7CCD-6A27-2008-58A038353B9C}"/>
               </a:ext>
             </a:extLst>
           </p:cNvPr>
@@ -2652,8 +2732,40 @@
           <a:p>
             <a:r>
               <a:rPr lang="en-US" dirty="0"/>
-              <a:t>Interactive maps</a:t>
-            </a:r>
+              <a:t>Data Representation</a:t>
+            </a:r>
+            <a:br>
+              <a:rPr lang="en-US" dirty="0"/>
+            </a:br>
+            <a:r>
+              <a:rPr lang="en-US" b="1" dirty="0"/>
+              <a:t>Thematic Maps</a:t>
+            </a:r>
+          </a:p>
+        </p:txBody>
+      </p:sp>
+      <p:sp>
+        <p:nvSpPr>
+          <p:cNvPr id="3" name="Content Placeholder 2">
+            <a:extLst>
+              <a:ext uri="{FF2B5EF4-FFF2-40B4-BE49-F238E27FC236}">
+                <a16:creationId xmlns:a16="http://schemas.microsoft.com/office/drawing/2014/main" id="{DF56C655-A93B-0845-C70D-FA0C9D1E159F}"/>
+              </a:ext>
+            </a:extLst>
+          </p:cNvPr>
+          <p:cNvSpPr>
+            <a:spLocks noGrp="1"/>
+          </p:cNvSpPr>
+          <p:nvPr>
+            <p:ph idx="1"/>
+          </p:nvPr>
+        </p:nvSpPr>
+        <p:spPr/>
+        <p:txBody>
+          <a:bodyPr/>
+          <a:lstStyle/>
+          <a:p>
+            <a:endParaRPr lang="en-US"/>
           </a:p>
         </p:txBody>
       </p:sp>
@@ -2662,7 +2774,7 @@
           <p:cNvPr id="4" name="Slide Number Placeholder 3">
             <a:extLst>
               <a:ext uri="{FF2B5EF4-FFF2-40B4-BE49-F238E27FC236}">
-                <a16:creationId xmlns:a16="http://schemas.microsoft.com/office/drawing/2014/main" id="{A49868F4-0621-D21D-0EF3-2F2D268C47DF}"/>
+                <a16:creationId xmlns:a16="http://schemas.microsoft.com/office/drawing/2014/main" id="{303DBA5A-5134-BA7E-0180-E06310DA7115}"/>
               </a:ext>
             </a:extLst>
           </p:cNvPr>
@@ -2689,7 +2801,7 @@
     </p:spTree>
     <p:extLst>
       <p:ext uri="{BB962C8B-B14F-4D97-AF65-F5344CB8AC3E}">
-        <p14:creationId xmlns:p14="http://schemas.microsoft.com/office/powerpoint/2010/main" val="925375383"/>
+        <p14:creationId xmlns:p14="http://schemas.microsoft.com/office/powerpoint/2010/main" val="1721669249"/>
       </p:ext>
     </p:extLst>
   </p:cSld>
@@ -2707,7 +2819,7 @@
         <p:cNvPr id="1" name="">
           <a:extLst>
             <a:ext uri="{FF2B5EF4-FFF2-40B4-BE49-F238E27FC236}">
-              <a16:creationId xmlns:a16="http://schemas.microsoft.com/office/drawing/2014/main" id="{A8A22A68-EF06-100A-3BF1-68AFE22C9C72}"/>
+              <a16:creationId xmlns:a16="http://schemas.microsoft.com/office/drawing/2014/main" id="{E2ECC64B-D999-17F5-7ADC-88EA9C69EF10}"/>
             </a:ext>
           </a:extLst>
         </p:cNvPr>
@@ -2727,7 +2839,7 @@
           <p:cNvPr id="2" name="Title 1">
             <a:extLst>
               <a:ext uri="{FF2B5EF4-FFF2-40B4-BE49-F238E27FC236}">
-                <a16:creationId xmlns:a16="http://schemas.microsoft.com/office/drawing/2014/main" id="{683A898A-1A9C-6725-65FD-ADCF83F275B2}"/>
+                <a16:creationId xmlns:a16="http://schemas.microsoft.com/office/drawing/2014/main" id="{E9F9763E-345C-C206-F9DC-87D40E13594D}"/>
               </a:ext>
             </a:extLst>
           </p:cNvPr>
@@ -2743,7 +2855,17 @@
           <a:bodyPr/>
           <a:lstStyle/>
           <a:p>
-            <a:endParaRPr lang="en-US"/>
+            <a:r>
+              <a:rPr lang="en-US" dirty="0"/>
+              <a:t>Data Representation</a:t>
+            </a:r>
+            <a:br>
+              <a:rPr lang="en-US" dirty="0"/>
+            </a:br>
+            <a:r>
+              <a:rPr lang="en-US" b="1" dirty="0"/>
+              <a:t>Symbols</a:t>
+            </a:r>
           </a:p>
         </p:txBody>
       </p:sp>
@@ -2752,7 +2874,7 @@
           <p:cNvPr id="3" name="Content Placeholder 2">
             <a:extLst>
               <a:ext uri="{FF2B5EF4-FFF2-40B4-BE49-F238E27FC236}">
-                <a16:creationId xmlns:a16="http://schemas.microsoft.com/office/drawing/2014/main" id="{A0E120AB-187D-B899-1A3E-7CC12F6C38EB}"/>
+                <a16:creationId xmlns:a16="http://schemas.microsoft.com/office/drawing/2014/main" id="{32EFBC93-CDEC-C802-F2A4-653FE747CE70}"/>
               </a:ext>
             </a:extLst>
           </p:cNvPr>
@@ -2777,7 +2899,7 @@
           <p:cNvPr id="4" name="Slide Number Placeholder 3">
             <a:extLst>
               <a:ext uri="{FF2B5EF4-FFF2-40B4-BE49-F238E27FC236}">
-                <a16:creationId xmlns:a16="http://schemas.microsoft.com/office/drawing/2014/main" id="{6F1CC0E9-0E1A-31B5-4EAA-0970B842600B}"/>
+                <a16:creationId xmlns:a16="http://schemas.microsoft.com/office/drawing/2014/main" id="{96ECC17C-0465-7F5A-EDED-DF19094E9F4E}"/>
               </a:ext>
             </a:extLst>
           </p:cNvPr>
@@ -2804,7 +2926,7 @@
     </p:spTree>
     <p:extLst>
       <p:ext uri="{BB962C8B-B14F-4D97-AF65-F5344CB8AC3E}">
-        <p14:creationId xmlns:p14="http://schemas.microsoft.com/office/powerpoint/2010/main" val="4250734745"/>
+        <p14:creationId xmlns:p14="http://schemas.microsoft.com/office/powerpoint/2010/main" val="1258004164"/>
       </p:ext>
     </p:extLst>
   </p:cSld>
@@ -2822,7 +2944,7 @@
         <p:cNvPr id="1" name="">
           <a:extLst>
             <a:ext uri="{FF2B5EF4-FFF2-40B4-BE49-F238E27FC236}">
-              <a16:creationId xmlns:a16="http://schemas.microsoft.com/office/drawing/2014/main" id="{B2F57D37-5C69-905D-6C0A-B3699FC9571A}"/>
+              <a16:creationId xmlns:a16="http://schemas.microsoft.com/office/drawing/2014/main" id="{23368246-CF18-1CFF-4DD6-DB4F178C2D09}"/>
             </a:ext>
           </a:extLst>
         </p:cNvPr>
@@ -2839,10 +2961,10 @@
       </p:grpSpPr>
       <p:sp>
         <p:nvSpPr>
-          <p:cNvPr id="5" name="Title 4">
-            <a:extLst>
-              <a:ext uri="{FF2B5EF4-FFF2-40B4-BE49-F238E27FC236}">
-                <a16:creationId xmlns:a16="http://schemas.microsoft.com/office/drawing/2014/main" id="{2C2500EA-3E20-82BD-2C3F-E9229E07712F}"/>
+          <p:cNvPr id="2" name="Title 1">
+            <a:extLst>
+              <a:ext uri="{FF2B5EF4-FFF2-40B4-BE49-F238E27FC236}">
+                <a16:creationId xmlns:a16="http://schemas.microsoft.com/office/drawing/2014/main" id="{608C3132-9EB3-CAEF-6B96-45ACB22CFD6E}"/>
               </a:ext>
             </a:extLst>
           </p:cNvPr>
@@ -2860,8 +2982,40 @@
           <a:p>
             <a:r>
               <a:rPr lang="en-US" dirty="0"/>
-              <a:t>Mapping applications</a:t>
-            </a:r>
+              <a:t>Data Representation</a:t>
+            </a:r>
+            <a:br>
+              <a:rPr lang="en-US" dirty="0"/>
+            </a:br>
+            <a:r>
+              <a:rPr lang="en-US" b="1" dirty="0"/>
+              <a:t>Rate vs Count</a:t>
+            </a:r>
+          </a:p>
+        </p:txBody>
+      </p:sp>
+      <p:sp>
+        <p:nvSpPr>
+          <p:cNvPr id="3" name="Content Placeholder 2">
+            <a:extLst>
+              <a:ext uri="{FF2B5EF4-FFF2-40B4-BE49-F238E27FC236}">
+                <a16:creationId xmlns:a16="http://schemas.microsoft.com/office/drawing/2014/main" id="{A44D2802-8EC2-3FDC-4875-DCB925A329B7}"/>
+              </a:ext>
+            </a:extLst>
+          </p:cNvPr>
+          <p:cNvSpPr>
+            <a:spLocks noGrp="1"/>
+          </p:cNvSpPr>
+          <p:nvPr>
+            <p:ph idx="1"/>
+          </p:nvPr>
+        </p:nvSpPr>
+        <p:spPr/>
+        <p:txBody>
+          <a:bodyPr/>
+          <a:lstStyle/>
+          <a:p>
+            <a:endParaRPr lang="en-US"/>
           </a:p>
         </p:txBody>
       </p:sp>
@@ -2870,7 +3024,7 @@
           <p:cNvPr id="4" name="Slide Number Placeholder 3">
             <a:extLst>
               <a:ext uri="{FF2B5EF4-FFF2-40B4-BE49-F238E27FC236}">
-                <a16:creationId xmlns:a16="http://schemas.microsoft.com/office/drawing/2014/main" id="{DC217F24-7728-5B60-D9E5-2CCC802DFE90}"/>
+                <a16:creationId xmlns:a16="http://schemas.microsoft.com/office/drawing/2014/main" id="{5878E0CE-1643-C6CC-DF35-4680AE41AF40}"/>
               </a:ext>
             </a:extLst>
           </p:cNvPr>
@@ -2897,7 +3051,7 @@
     </p:spTree>
     <p:extLst>
       <p:ext uri="{BB962C8B-B14F-4D97-AF65-F5344CB8AC3E}">
-        <p14:creationId xmlns:p14="http://schemas.microsoft.com/office/powerpoint/2010/main" val="3273839397"/>
+        <p14:creationId xmlns:p14="http://schemas.microsoft.com/office/powerpoint/2010/main" val="349181532"/>
       </p:ext>
     </p:extLst>
   </p:cSld>
@@ -2915,7 +3069,7 @@
         <p:cNvPr id="1" name="">
           <a:extLst>
             <a:ext uri="{FF2B5EF4-FFF2-40B4-BE49-F238E27FC236}">
-              <a16:creationId xmlns:a16="http://schemas.microsoft.com/office/drawing/2014/main" id="{12328F41-73AF-2FE0-18CE-2743A6437028}"/>
+              <a16:creationId xmlns:a16="http://schemas.microsoft.com/office/drawing/2014/main" id="{A2BDD0B1-3E3A-22FD-62A1-D887A1D75D6A}"/>
             </a:ext>
           </a:extLst>
         </p:cNvPr>
@@ -2935,7 +3089,7 @@
           <p:cNvPr id="2" name="Title 1">
             <a:extLst>
               <a:ext uri="{FF2B5EF4-FFF2-40B4-BE49-F238E27FC236}">
-                <a16:creationId xmlns:a16="http://schemas.microsoft.com/office/drawing/2014/main" id="{C9A0FB9D-E7E4-FE1B-1A19-9A2E846826E1}"/>
+                <a16:creationId xmlns:a16="http://schemas.microsoft.com/office/drawing/2014/main" id="{C098F571-5315-3247-DDF1-B0A6CD54C306}"/>
               </a:ext>
             </a:extLst>
           </p:cNvPr>
@@ -2951,7 +3105,18 @@
           <a:bodyPr/>
           <a:lstStyle/>
           <a:p>
-            <a:endParaRPr lang="en-US"/>
+            <a:r>
+              <a:rPr lang="en-US" dirty="0"/>
+              <a:t>Data Representation</a:t>
+            </a:r>
+            <a:br>
+              <a:rPr lang="en-US" dirty="0"/>
+            </a:br>
+            <a:r>
+              <a:rPr lang="en-US" b="1" dirty="0" err="1"/>
+              <a:t>Colour</a:t>
+            </a:r>
+            <a:endParaRPr lang="en-US" b="1" dirty="0"/>
           </a:p>
         </p:txBody>
       </p:sp>
@@ -2960,7 +3125,7 @@
           <p:cNvPr id="3" name="Content Placeholder 2">
             <a:extLst>
               <a:ext uri="{FF2B5EF4-FFF2-40B4-BE49-F238E27FC236}">
-                <a16:creationId xmlns:a16="http://schemas.microsoft.com/office/drawing/2014/main" id="{FA9794CF-6B0A-B06F-DFF3-9A1B2BE0CA63}"/>
+                <a16:creationId xmlns:a16="http://schemas.microsoft.com/office/drawing/2014/main" id="{01005197-31B0-887A-90BA-C76469CCBDC9}"/>
               </a:ext>
             </a:extLst>
           </p:cNvPr>
@@ -2985,7 +3150,7 @@
           <p:cNvPr id="4" name="Slide Number Placeholder 3">
             <a:extLst>
               <a:ext uri="{FF2B5EF4-FFF2-40B4-BE49-F238E27FC236}">
-                <a16:creationId xmlns:a16="http://schemas.microsoft.com/office/drawing/2014/main" id="{1FA18C70-EF25-DA32-D7F2-91859E10209B}"/>
+                <a16:creationId xmlns:a16="http://schemas.microsoft.com/office/drawing/2014/main" id="{A14C1BAE-E96B-90E7-88D4-083AB21D9906}"/>
               </a:ext>
             </a:extLst>
           </p:cNvPr>
@@ -3012,7 +3177,7 @@
     </p:spTree>
     <p:extLst>
       <p:ext uri="{BB962C8B-B14F-4D97-AF65-F5344CB8AC3E}">
-        <p14:creationId xmlns:p14="http://schemas.microsoft.com/office/powerpoint/2010/main" val="3533329453"/>
+        <p14:creationId xmlns:p14="http://schemas.microsoft.com/office/powerpoint/2010/main" val="1621774908"/>
       </p:ext>
     </p:extLst>
   </p:cSld>
@@ -3027,7 +3192,13 @@
   <p:cSld>
     <p:spTree>
       <p:nvGrpSpPr>
-        <p:cNvPr id="1" name=""/>
+        <p:cNvPr id="1" name="">
+          <a:extLst>
+            <a:ext uri="{FF2B5EF4-FFF2-40B4-BE49-F238E27FC236}">
+              <a16:creationId xmlns:a16="http://schemas.microsoft.com/office/drawing/2014/main" id="{8FAB9695-5772-0A13-F911-172D9CA28943}"/>
+            </a:ext>
+          </a:extLst>
+        </p:cNvPr>
         <p:cNvGrpSpPr/>
         <p:nvPr/>
       </p:nvGrpSpPr>
@@ -3044,7 +3215,7 @@
           <p:cNvPr id="2" name="Title 1">
             <a:extLst>
               <a:ext uri="{FF2B5EF4-FFF2-40B4-BE49-F238E27FC236}">
-                <a16:creationId xmlns:a16="http://schemas.microsoft.com/office/drawing/2014/main" id="{EE1778A9-DF75-760E-5946-D5CB9BB0CCCA}"/>
+                <a16:creationId xmlns:a16="http://schemas.microsoft.com/office/drawing/2014/main" id="{00962A00-E734-34D8-6113-320596180DE6}"/>
               </a:ext>
             </a:extLst>
           </p:cNvPr>
@@ -3062,8 +3233,9 @@
           <a:p>
             <a:r>
               <a:rPr lang="en-US" dirty="0"/>
-              <a:t>Next</a:t>
-            </a:r>
+              <a:t>Text</a:t>
+            </a:r>
+            <a:endParaRPr lang="en-US" b="1" dirty="0"/>
           </a:p>
         </p:txBody>
       </p:sp>
@@ -3072,7 +3244,7 @@
           <p:cNvPr id="3" name="Content Placeholder 2">
             <a:extLst>
               <a:ext uri="{FF2B5EF4-FFF2-40B4-BE49-F238E27FC236}">
-                <a16:creationId xmlns:a16="http://schemas.microsoft.com/office/drawing/2014/main" id="{9D8C69DB-0DB5-ECA1-24D0-4233342F2729}"/>
+                <a16:creationId xmlns:a16="http://schemas.microsoft.com/office/drawing/2014/main" id="{638F7C29-A1B4-116B-40B3-675F669A4814}"/>
               </a:ext>
             </a:extLst>
           </p:cNvPr>
@@ -3088,78 +3260,7 @@
           <a:bodyPr/>
           <a:lstStyle/>
           <a:p>
-            <a:r>
-              <a:rPr lang="en-US" dirty="0"/>
-              <a:t>Getting started with statistical learning</a:t>
-            </a:r>
-          </a:p>
-          <a:p>
-            <a:pPr lvl="1"/>
-            <a:r>
-              <a:rPr lang="en-US" dirty="0"/>
-              <a:t>Exploratory spatial data analysis</a:t>
-            </a:r>
-            <a:br>
-              <a:rPr lang="en-US" dirty="0"/>
-            </a:br>
-            <a:r>
-              <a:rPr lang="en-US" sz="1600" dirty="0">
-                <a:hlinkClick r:id="rId2"/>
-              </a:rPr>
-              <a:t>https://cran.r-project.org/web/packages/geostan/vignettes/measuring-sa.html</a:t>
-            </a:r>
-            <a:endParaRPr lang="en-US" sz="1600" dirty="0"/>
-          </a:p>
-          <a:p>
-            <a:pPr lvl="1"/>
-            <a:r>
-              <a:rPr lang="en-US" dirty="0"/>
-              <a:t>Measures of spatial autocorrelation</a:t>
-            </a:r>
-            <a:br>
-              <a:rPr lang="en-US" dirty="0"/>
-            </a:br>
-            <a:r>
-              <a:rPr lang="en-US" sz="1600" dirty="0">
-                <a:hlinkClick r:id="rId3"/>
-              </a:rPr>
-              <a:t>https://r-spatial.org/book/15-Measures.html</a:t>
-            </a:r>
-            <a:endParaRPr lang="en-US" sz="1600" dirty="0"/>
-          </a:p>
-          <a:p>
-            <a:pPr lvl="1"/>
-            <a:r>
-              <a:rPr lang="en-US" dirty="0"/>
-              <a:t>Point pattern analysis</a:t>
-            </a:r>
-            <a:br>
-              <a:rPr lang="en-US" dirty="0"/>
-            </a:br>
-            <a:r>
-              <a:rPr lang="en-US" sz="1600" dirty="0">
-                <a:hlinkClick r:id="rId4"/>
-              </a:rPr>
-              <a:t>https://r-spatial.org/book/11-PointPattern.html</a:t>
-            </a:r>
-            <a:endParaRPr lang="en-US" dirty="0"/>
-          </a:p>
-          <a:p>
-            <a:pPr lvl="1"/>
-            <a:r>
-              <a:rPr lang="en-US" dirty="0"/>
-              <a:t>Spatial interpolation</a:t>
-            </a:r>
-            <a:br>
-              <a:rPr lang="en-US" dirty="0"/>
-            </a:br>
-            <a:r>
-              <a:rPr lang="en-US" sz="1600" dirty="0">
-                <a:hlinkClick r:id="rId5"/>
-              </a:rPr>
-              <a:t>https://r-spatial.org/book/12-Interpolation.html</a:t>
-            </a:r>
-            <a:endParaRPr lang="en-US" dirty="0"/>
+            <a:endParaRPr lang="en-US"/>
           </a:p>
         </p:txBody>
       </p:sp>
@@ -3168,7 +3269,7 @@
           <p:cNvPr id="4" name="Slide Number Placeholder 3">
             <a:extLst>
               <a:ext uri="{FF2B5EF4-FFF2-40B4-BE49-F238E27FC236}">
-                <a16:creationId xmlns:a16="http://schemas.microsoft.com/office/drawing/2014/main" id="{D2808ED0-60BE-81B0-39D1-0C0EE44FDD5E}"/>
+                <a16:creationId xmlns:a16="http://schemas.microsoft.com/office/drawing/2014/main" id="{C811D8F9-C7A9-4D9C-3827-B8A0B776844B}"/>
               </a:ext>
             </a:extLst>
           </p:cNvPr>
@@ -3195,7 +3296,614 @@
     </p:spTree>
     <p:extLst>
       <p:ext uri="{BB962C8B-B14F-4D97-AF65-F5344CB8AC3E}">
-        <p14:creationId xmlns:p14="http://schemas.microsoft.com/office/powerpoint/2010/main" val="2393416786"/>
+        <p14:creationId xmlns:p14="http://schemas.microsoft.com/office/powerpoint/2010/main" val="2274443264"/>
+      </p:ext>
+    </p:extLst>
+  </p:cSld>
+  <p:clrMapOvr>
+    <a:masterClrMapping/>
+  </p:clrMapOvr>
+</p:sld>
+</file>
+
+<file path=ppt/slides/slide15.xml><?xml version="1.0" encoding="utf-8"?>
+<p:sld xmlns:a="http://schemas.openxmlformats.org/drawingml/2006/main" xmlns:r="http://schemas.openxmlformats.org/officeDocument/2006/relationships" xmlns:p="http://schemas.openxmlformats.org/presentationml/2006/main">
+  <p:cSld>
+    <p:spTree>
+      <p:nvGrpSpPr>
+        <p:cNvPr id="1" name="">
+          <a:extLst>
+            <a:ext uri="{FF2B5EF4-FFF2-40B4-BE49-F238E27FC236}">
+              <a16:creationId xmlns:a16="http://schemas.microsoft.com/office/drawing/2014/main" id="{D1C8D1D8-1A35-106E-52E1-185C112F3AFA}"/>
+            </a:ext>
+          </a:extLst>
+        </p:cNvPr>
+        <p:cNvGrpSpPr/>
+        <p:nvPr/>
+      </p:nvGrpSpPr>
+      <p:grpSpPr>
+        <a:xfrm>
+          <a:off x="0" y="0"/>
+          <a:ext cx="0" cy="0"/>
+          <a:chOff x="0" y="0"/>
+          <a:chExt cx="0" cy="0"/>
+        </a:xfrm>
+      </p:grpSpPr>
+      <p:sp>
+        <p:nvSpPr>
+          <p:cNvPr id="2" name="Title 1">
+            <a:extLst>
+              <a:ext uri="{FF2B5EF4-FFF2-40B4-BE49-F238E27FC236}">
+                <a16:creationId xmlns:a16="http://schemas.microsoft.com/office/drawing/2014/main" id="{33F9A046-676E-39EF-5BAD-70A5828AA6E6}"/>
+              </a:ext>
+            </a:extLst>
+          </p:cNvPr>
+          <p:cNvSpPr>
+            <a:spLocks noGrp="1"/>
+          </p:cNvSpPr>
+          <p:nvPr>
+            <p:ph type="title"/>
+          </p:nvPr>
+        </p:nvSpPr>
+        <p:spPr/>
+        <p:txBody>
+          <a:bodyPr/>
+          <a:lstStyle/>
+          <a:p>
+            <a:r>
+              <a:rPr lang="en-US" dirty="0"/>
+              <a:t>Legend</a:t>
+            </a:r>
+            <a:endParaRPr lang="en-US" b="1" dirty="0"/>
+          </a:p>
+        </p:txBody>
+      </p:sp>
+      <p:sp>
+        <p:nvSpPr>
+          <p:cNvPr id="3" name="Content Placeholder 2">
+            <a:extLst>
+              <a:ext uri="{FF2B5EF4-FFF2-40B4-BE49-F238E27FC236}">
+                <a16:creationId xmlns:a16="http://schemas.microsoft.com/office/drawing/2014/main" id="{75644077-1151-2ED8-19BE-C70425708990}"/>
+              </a:ext>
+            </a:extLst>
+          </p:cNvPr>
+          <p:cNvSpPr>
+            <a:spLocks noGrp="1"/>
+          </p:cNvSpPr>
+          <p:nvPr>
+            <p:ph idx="1"/>
+          </p:nvPr>
+        </p:nvSpPr>
+        <p:spPr/>
+        <p:txBody>
+          <a:bodyPr/>
+          <a:lstStyle/>
+          <a:p>
+            <a:endParaRPr lang="en-US"/>
+          </a:p>
+        </p:txBody>
+      </p:sp>
+      <p:sp>
+        <p:nvSpPr>
+          <p:cNvPr id="4" name="Slide Number Placeholder 3">
+            <a:extLst>
+              <a:ext uri="{FF2B5EF4-FFF2-40B4-BE49-F238E27FC236}">
+                <a16:creationId xmlns:a16="http://schemas.microsoft.com/office/drawing/2014/main" id="{566FBE1A-A6A3-B6C3-5CAC-119725B82A6B}"/>
+              </a:ext>
+            </a:extLst>
+          </p:cNvPr>
+          <p:cNvSpPr>
+            <a:spLocks noGrp="1"/>
+          </p:cNvSpPr>
+          <p:nvPr>
+            <p:ph type="sldNum" sz="quarter" idx="12"/>
+          </p:nvPr>
+        </p:nvSpPr>
+        <p:spPr/>
+        <p:txBody>
+          <a:bodyPr/>
+          <a:lstStyle/>
+          <a:p>
+            <a:fld id="{C0343C75-1924-D247-85A3-0CB62E67E5D1}" type="slidenum">
+              <a:rPr lang="en-US" smtClean="0"/>
+              <a:t>15</a:t>
+            </a:fld>
+            <a:endParaRPr lang="en-US"/>
+          </a:p>
+        </p:txBody>
+      </p:sp>
+    </p:spTree>
+    <p:extLst>
+      <p:ext uri="{BB962C8B-B14F-4D97-AF65-F5344CB8AC3E}">
+        <p14:creationId xmlns:p14="http://schemas.microsoft.com/office/powerpoint/2010/main" val="2963273183"/>
+      </p:ext>
+    </p:extLst>
+  </p:cSld>
+  <p:clrMapOvr>
+    <a:masterClrMapping/>
+  </p:clrMapOvr>
+</p:sld>
+</file>
+
+<file path=ppt/slides/slide16.xml><?xml version="1.0" encoding="utf-8"?>
+<p:sld xmlns:a="http://schemas.openxmlformats.org/drawingml/2006/main" xmlns:r="http://schemas.openxmlformats.org/officeDocument/2006/relationships" xmlns:p="http://schemas.openxmlformats.org/presentationml/2006/main">
+  <p:cSld>
+    <p:spTree>
+      <p:nvGrpSpPr>
+        <p:cNvPr id="1" name="">
+          <a:extLst>
+            <a:ext uri="{FF2B5EF4-FFF2-40B4-BE49-F238E27FC236}">
+              <a16:creationId xmlns:a16="http://schemas.microsoft.com/office/drawing/2014/main" id="{BBBC1B7F-71D2-3A8E-4F55-5B4754E13EF4}"/>
+            </a:ext>
+          </a:extLst>
+        </p:cNvPr>
+        <p:cNvGrpSpPr/>
+        <p:nvPr/>
+      </p:nvGrpSpPr>
+      <p:grpSpPr>
+        <a:xfrm>
+          <a:off x="0" y="0"/>
+          <a:ext cx="0" cy="0"/>
+          <a:chOff x="0" y="0"/>
+          <a:chExt cx="0" cy="0"/>
+        </a:xfrm>
+      </p:grpSpPr>
+      <p:sp>
+        <p:nvSpPr>
+          <p:cNvPr id="2" name="Title 1">
+            <a:extLst>
+              <a:ext uri="{FF2B5EF4-FFF2-40B4-BE49-F238E27FC236}">
+                <a16:creationId xmlns:a16="http://schemas.microsoft.com/office/drawing/2014/main" id="{6D5EF4E6-5BC4-ED86-255E-A232B1B5CDA5}"/>
+              </a:ext>
+            </a:extLst>
+          </p:cNvPr>
+          <p:cNvSpPr>
+            <a:spLocks noGrp="1"/>
+          </p:cNvSpPr>
+          <p:nvPr>
+            <p:ph type="title"/>
+          </p:nvPr>
+        </p:nvSpPr>
+        <p:spPr/>
+        <p:txBody>
+          <a:bodyPr/>
+          <a:lstStyle/>
+          <a:p>
+            <a:r>
+              <a:rPr lang="en-US" dirty="0"/>
+              <a:t>Annotation/Production Notes</a:t>
+            </a:r>
+            <a:endParaRPr lang="en-US" b="1" dirty="0"/>
+          </a:p>
+        </p:txBody>
+      </p:sp>
+      <p:sp>
+        <p:nvSpPr>
+          <p:cNvPr id="3" name="Content Placeholder 2">
+            <a:extLst>
+              <a:ext uri="{FF2B5EF4-FFF2-40B4-BE49-F238E27FC236}">
+                <a16:creationId xmlns:a16="http://schemas.microsoft.com/office/drawing/2014/main" id="{031F3A3D-8DED-89E4-14F4-5D65F570FBF2}"/>
+              </a:ext>
+            </a:extLst>
+          </p:cNvPr>
+          <p:cNvSpPr>
+            <a:spLocks noGrp="1"/>
+          </p:cNvSpPr>
+          <p:nvPr>
+            <p:ph idx="1"/>
+          </p:nvPr>
+        </p:nvSpPr>
+        <p:spPr/>
+        <p:txBody>
+          <a:bodyPr/>
+          <a:lstStyle/>
+          <a:p>
+            <a:endParaRPr lang="en-US"/>
+          </a:p>
+        </p:txBody>
+      </p:sp>
+      <p:sp>
+        <p:nvSpPr>
+          <p:cNvPr id="4" name="Slide Number Placeholder 3">
+            <a:extLst>
+              <a:ext uri="{FF2B5EF4-FFF2-40B4-BE49-F238E27FC236}">
+                <a16:creationId xmlns:a16="http://schemas.microsoft.com/office/drawing/2014/main" id="{1FB74C40-4216-8A5C-8B0C-99A89DEFB701}"/>
+              </a:ext>
+            </a:extLst>
+          </p:cNvPr>
+          <p:cNvSpPr>
+            <a:spLocks noGrp="1"/>
+          </p:cNvSpPr>
+          <p:nvPr>
+            <p:ph type="sldNum" sz="quarter" idx="12"/>
+          </p:nvPr>
+        </p:nvSpPr>
+        <p:spPr/>
+        <p:txBody>
+          <a:bodyPr/>
+          <a:lstStyle/>
+          <a:p>
+            <a:fld id="{C0343C75-1924-D247-85A3-0CB62E67E5D1}" type="slidenum">
+              <a:rPr lang="en-US" smtClean="0"/>
+              <a:t>16</a:t>
+            </a:fld>
+            <a:endParaRPr lang="en-US"/>
+          </a:p>
+        </p:txBody>
+      </p:sp>
+    </p:spTree>
+    <p:extLst>
+      <p:ext uri="{BB962C8B-B14F-4D97-AF65-F5344CB8AC3E}">
+        <p14:creationId xmlns:p14="http://schemas.microsoft.com/office/powerpoint/2010/main" val="1654664969"/>
+      </p:ext>
+    </p:extLst>
+  </p:cSld>
+  <p:clrMapOvr>
+    <a:masterClrMapping/>
+  </p:clrMapOvr>
+</p:sld>
+</file>
+
+<file path=ppt/slides/slide17.xml><?xml version="1.0" encoding="utf-8"?>
+<p:sld xmlns:a="http://schemas.openxmlformats.org/drawingml/2006/main" xmlns:r="http://schemas.openxmlformats.org/officeDocument/2006/relationships" xmlns:p="http://schemas.openxmlformats.org/presentationml/2006/main">
+  <p:cSld>
+    <p:spTree>
+      <p:nvGrpSpPr>
+        <p:cNvPr id="1" name="">
+          <a:extLst>
+            <a:ext uri="{FF2B5EF4-FFF2-40B4-BE49-F238E27FC236}">
+              <a16:creationId xmlns:a16="http://schemas.microsoft.com/office/drawing/2014/main" id="{4D4E21A1-35BA-9A45-8277-AC3DA98332CA}"/>
+            </a:ext>
+          </a:extLst>
+        </p:cNvPr>
+        <p:cNvGrpSpPr/>
+        <p:nvPr/>
+      </p:nvGrpSpPr>
+      <p:grpSpPr>
+        <a:xfrm>
+          <a:off x="0" y="0"/>
+          <a:ext cx="0" cy="0"/>
+          <a:chOff x="0" y="0"/>
+          <a:chExt cx="0" cy="0"/>
+        </a:xfrm>
+      </p:grpSpPr>
+      <p:sp>
+        <p:nvSpPr>
+          <p:cNvPr id="2" name="Title 1">
+            <a:extLst>
+              <a:ext uri="{FF2B5EF4-FFF2-40B4-BE49-F238E27FC236}">
+                <a16:creationId xmlns:a16="http://schemas.microsoft.com/office/drawing/2014/main" id="{14A448B5-FD3F-EEEB-B436-F09710875093}"/>
+              </a:ext>
+            </a:extLst>
+          </p:cNvPr>
+          <p:cNvSpPr>
+            <a:spLocks noGrp="1"/>
+          </p:cNvSpPr>
+          <p:nvPr>
+            <p:ph type="title"/>
+          </p:nvPr>
+        </p:nvSpPr>
+        <p:spPr/>
+        <p:txBody>
+          <a:bodyPr/>
+          <a:lstStyle/>
+          <a:p>
+            <a:r>
+              <a:rPr lang="en-US" dirty="0"/>
+              <a:t>Composition / Orientation / Scale</a:t>
+            </a:r>
+            <a:endParaRPr lang="en-US" b="1" dirty="0"/>
+          </a:p>
+        </p:txBody>
+      </p:sp>
+      <p:sp>
+        <p:nvSpPr>
+          <p:cNvPr id="3" name="Content Placeholder 2">
+            <a:extLst>
+              <a:ext uri="{FF2B5EF4-FFF2-40B4-BE49-F238E27FC236}">
+                <a16:creationId xmlns:a16="http://schemas.microsoft.com/office/drawing/2014/main" id="{A9A0D4B8-1757-71F4-B4BE-FFED7E6C0B6D}"/>
+              </a:ext>
+            </a:extLst>
+          </p:cNvPr>
+          <p:cNvSpPr>
+            <a:spLocks noGrp="1"/>
+          </p:cNvSpPr>
+          <p:nvPr>
+            <p:ph idx="1"/>
+          </p:nvPr>
+        </p:nvSpPr>
+        <p:spPr/>
+        <p:txBody>
+          <a:bodyPr/>
+          <a:lstStyle/>
+          <a:p>
+            <a:endParaRPr lang="en-US"/>
+          </a:p>
+        </p:txBody>
+      </p:sp>
+      <p:sp>
+        <p:nvSpPr>
+          <p:cNvPr id="4" name="Slide Number Placeholder 3">
+            <a:extLst>
+              <a:ext uri="{FF2B5EF4-FFF2-40B4-BE49-F238E27FC236}">
+                <a16:creationId xmlns:a16="http://schemas.microsoft.com/office/drawing/2014/main" id="{A9CD3432-E192-95BD-3DF5-BEC3498EC94D}"/>
+              </a:ext>
+            </a:extLst>
+          </p:cNvPr>
+          <p:cNvSpPr>
+            <a:spLocks noGrp="1"/>
+          </p:cNvSpPr>
+          <p:nvPr>
+            <p:ph type="sldNum" sz="quarter" idx="12"/>
+          </p:nvPr>
+        </p:nvSpPr>
+        <p:spPr/>
+        <p:txBody>
+          <a:bodyPr/>
+          <a:lstStyle/>
+          <a:p>
+            <a:fld id="{C0343C75-1924-D247-85A3-0CB62E67E5D1}" type="slidenum">
+              <a:rPr lang="en-US" smtClean="0"/>
+              <a:t>17</a:t>
+            </a:fld>
+            <a:endParaRPr lang="en-US"/>
+          </a:p>
+        </p:txBody>
+      </p:sp>
+    </p:spTree>
+    <p:extLst>
+      <p:ext uri="{BB962C8B-B14F-4D97-AF65-F5344CB8AC3E}">
+        <p14:creationId xmlns:p14="http://schemas.microsoft.com/office/powerpoint/2010/main" val="3535271997"/>
+      </p:ext>
+    </p:extLst>
+  </p:cSld>
+  <p:clrMapOvr>
+    <a:masterClrMapping/>
+  </p:clrMapOvr>
+</p:sld>
+</file>
+
+<file path=ppt/slides/slide18.xml><?xml version="1.0" encoding="utf-8"?>
+<p:sld xmlns:a="http://schemas.openxmlformats.org/drawingml/2006/main" xmlns:r="http://schemas.openxmlformats.org/officeDocument/2006/relationships" xmlns:p="http://schemas.openxmlformats.org/presentationml/2006/main">
+  <p:cSld>
+    <p:spTree>
+      <p:nvGrpSpPr>
+        <p:cNvPr id="1" name="">
+          <a:extLst>
+            <a:ext uri="{FF2B5EF4-FFF2-40B4-BE49-F238E27FC236}">
+              <a16:creationId xmlns:a16="http://schemas.microsoft.com/office/drawing/2014/main" id="{24E63484-2694-8197-E3DC-94CF77C93DA5}"/>
+            </a:ext>
+          </a:extLst>
+        </p:cNvPr>
+        <p:cNvGrpSpPr/>
+        <p:nvPr/>
+      </p:nvGrpSpPr>
+      <p:grpSpPr>
+        <a:xfrm>
+          <a:off x="0" y="0"/>
+          <a:ext cx="0" cy="0"/>
+          <a:chOff x="0" y="0"/>
+          <a:chExt cx="0" cy="0"/>
+        </a:xfrm>
+      </p:grpSpPr>
+      <p:sp>
+        <p:nvSpPr>
+          <p:cNvPr id="2" name="Title 1">
+            <a:extLst>
+              <a:ext uri="{FF2B5EF4-FFF2-40B4-BE49-F238E27FC236}">
+                <a16:creationId xmlns:a16="http://schemas.microsoft.com/office/drawing/2014/main" id="{99D12227-87B1-4D2A-AE12-51215BF152DA}"/>
+              </a:ext>
+            </a:extLst>
+          </p:cNvPr>
+          <p:cNvSpPr>
+            <a:spLocks noGrp="1"/>
+          </p:cNvSpPr>
+          <p:nvPr>
+            <p:ph type="title"/>
+          </p:nvPr>
+        </p:nvSpPr>
+        <p:spPr/>
+        <p:txBody>
+          <a:bodyPr/>
+          <a:lstStyle/>
+          <a:p>
+            <a:r>
+              <a:rPr lang="en-US" dirty="0"/>
+              <a:t>Context</a:t>
+            </a:r>
+            <a:br>
+              <a:rPr lang="en-US" dirty="0"/>
+            </a:br>
+            <a:r>
+              <a:rPr lang="en-US" b="1" dirty="0"/>
+              <a:t>Basemap</a:t>
+            </a:r>
+          </a:p>
+        </p:txBody>
+      </p:sp>
+      <p:sp>
+        <p:nvSpPr>
+          <p:cNvPr id="3" name="Content Placeholder 2">
+            <a:extLst>
+              <a:ext uri="{FF2B5EF4-FFF2-40B4-BE49-F238E27FC236}">
+                <a16:creationId xmlns:a16="http://schemas.microsoft.com/office/drawing/2014/main" id="{94278D24-C32A-9230-F6D9-4F4F6AEC316F}"/>
+              </a:ext>
+            </a:extLst>
+          </p:cNvPr>
+          <p:cNvSpPr>
+            <a:spLocks noGrp="1"/>
+          </p:cNvSpPr>
+          <p:nvPr>
+            <p:ph idx="1"/>
+          </p:nvPr>
+        </p:nvSpPr>
+        <p:spPr/>
+        <p:txBody>
+          <a:bodyPr/>
+          <a:lstStyle/>
+          <a:p>
+            <a:endParaRPr lang="en-US"/>
+          </a:p>
+        </p:txBody>
+      </p:sp>
+      <p:sp>
+        <p:nvSpPr>
+          <p:cNvPr id="4" name="Slide Number Placeholder 3">
+            <a:extLst>
+              <a:ext uri="{FF2B5EF4-FFF2-40B4-BE49-F238E27FC236}">
+                <a16:creationId xmlns:a16="http://schemas.microsoft.com/office/drawing/2014/main" id="{CBDBB7E6-D148-84DB-06BB-10A43BF57AA3}"/>
+              </a:ext>
+            </a:extLst>
+          </p:cNvPr>
+          <p:cNvSpPr>
+            <a:spLocks noGrp="1"/>
+          </p:cNvSpPr>
+          <p:nvPr>
+            <p:ph type="sldNum" sz="quarter" idx="12"/>
+          </p:nvPr>
+        </p:nvSpPr>
+        <p:spPr/>
+        <p:txBody>
+          <a:bodyPr/>
+          <a:lstStyle/>
+          <a:p>
+            <a:fld id="{C0343C75-1924-D247-85A3-0CB62E67E5D1}" type="slidenum">
+              <a:rPr lang="en-US" smtClean="0"/>
+              <a:t>18</a:t>
+            </a:fld>
+            <a:endParaRPr lang="en-US"/>
+          </a:p>
+        </p:txBody>
+      </p:sp>
+    </p:spTree>
+    <p:extLst>
+      <p:ext uri="{BB962C8B-B14F-4D97-AF65-F5344CB8AC3E}">
+        <p14:creationId xmlns:p14="http://schemas.microsoft.com/office/powerpoint/2010/main" val="2615006278"/>
+      </p:ext>
+    </p:extLst>
+  </p:cSld>
+  <p:clrMapOvr>
+    <a:masterClrMapping/>
+  </p:clrMapOvr>
+</p:sld>
+</file>
+
+<file path=ppt/slides/slide19.xml><?xml version="1.0" encoding="utf-8"?>
+<p:sld xmlns:a="http://schemas.openxmlformats.org/drawingml/2006/main" xmlns:r="http://schemas.openxmlformats.org/officeDocument/2006/relationships" xmlns:p="http://schemas.openxmlformats.org/presentationml/2006/main">
+  <p:cSld>
+    <p:spTree>
+      <p:nvGrpSpPr>
+        <p:cNvPr id="1" name="">
+          <a:extLst>
+            <a:ext uri="{FF2B5EF4-FFF2-40B4-BE49-F238E27FC236}">
+              <a16:creationId xmlns:a16="http://schemas.microsoft.com/office/drawing/2014/main" id="{09A8C348-140B-DFD4-BE6A-B4AC972E1907}"/>
+            </a:ext>
+          </a:extLst>
+        </p:cNvPr>
+        <p:cNvGrpSpPr/>
+        <p:nvPr/>
+      </p:nvGrpSpPr>
+      <p:grpSpPr>
+        <a:xfrm>
+          <a:off x="0" y="0"/>
+          <a:ext cx="0" cy="0"/>
+          <a:chOff x="0" y="0"/>
+          <a:chExt cx="0" cy="0"/>
+        </a:xfrm>
+      </p:grpSpPr>
+      <p:sp>
+        <p:nvSpPr>
+          <p:cNvPr id="2" name="Title 1">
+            <a:extLst>
+              <a:ext uri="{FF2B5EF4-FFF2-40B4-BE49-F238E27FC236}">
+                <a16:creationId xmlns:a16="http://schemas.microsoft.com/office/drawing/2014/main" id="{1822EADC-42A7-47D9-989E-95168F40584F}"/>
+              </a:ext>
+            </a:extLst>
+          </p:cNvPr>
+          <p:cNvSpPr>
+            <a:spLocks noGrp="1"/>
+          </p:cNvSpPr>
+          <p:nvPr>
+            <p:ph type="title"/>
+          </p:nvPr>
+        </p:nvSpPr>
+        <p:spPr/>
+        <p:txBody>
+          <a:bodyPr/>
+          <a:lstStyle/>
+          <a:p>
+            <a:r>
+              <a:rPr lang="en-US" dirty="0"/>
+              <a:t>Context</a:t>
+            </a:r>
+            <a:br>
+              <a:rPr lang="en-US" dirty="0"/>
+            </a:br>
+            <a:r>
+              <a:rPr lang="en-US" b="1" dirty="0"/>
+              <a:t>Inset Maps</a:t>
+            </a:r>
+          </a:p>
+        </p:txBody>
+      </p:sp>
+      <p:sp>
+        <p:nvSpPr>
+          <p:cNvPr id="3" name="Content Placeholder 2">
+            <a:extLst>
+              <a:ext uri="{FF2B5EF4-FFF2-40B4-BE49-F238E27FC236}">
+                <a16:creationId xmlns:a16="http://schemas.microsoft.com/office/drawing/2014/main" id="{39851B43-F316-1A9C-8941-DFE4BB33B0C3}"/>
+              </a:ext>
+            </a:extLst>
+          </p:cNvPr>
+          <p:cNvSpPr>
+            <a:spLocks noGrp="1"/>
+          </p:cNvSpPr>
+          <p:nvPr>
+            <p:ph idx="1"/>
+          </p:nvPr>
+        </p:nvSpPr>
+        <p:spPr/>
+        <p:txBody>
+          <a:bodyPr/>
+          <a:lstStyle/>
+          <a:p>
+            <a:endParaRPr lang="en-US"/>
+          </a:p>
+        </p:txBody>
+      </p:sp>
+      <p:sp>
+        <p:nvSpPr>
+          <p:cNvPr id="4" name="Slide Number Placeholder 3">
+            <a:extLst>
+              <a:ext uri="{FF2B5EF4-FFF2-40B4-BE49-F238E27FC236}">
+                <a16:creationId xmlns:a16="http://schemas.microsoft.com/office/drawing/2014/main" id="{5D708F04-FD02-0849-904E-42C4BFE247BB}"/>
+              </a:ext>
+            </a:extLst>
+          </p:cNvPr>
+          <p:cNvSpPr>
+            <a:spLocks noGrp="1"/>
+          </p:cNvSpPr>
+          <p:nvPr>
+            <p:ph type="sldNum" sz="quarter" idx="12"/>
+          </p:nvPr>
+        </p:nvSpPr>
+        <p:spPr/>
+        <p:txBody>
+          <a:bodyPr/>
+          <a:lstStyle/>
+          <a:p>
+            <a:fld id="{C0343C75-1924-D247-85A3-0CB62E67E5D1}" type="slidenum">
+              <a:rPr lang="en-US" smtClean="0"/>
+              <a:t>19</a:t>
+            </a:fld>
+            <a:endParaRPr lang="en-US"/>
+          </a:p>
+        </p:txBody>
+      </p:sp>
+    </p:spTree>
+    <p:extLst>
+      <p:ext uri="{BB962C8B-B14F-4D97-AF65-F5344CB8AC3E}">
+        <p14:creationId xmlns:p14="http://schemas.microsoft.com/office/powerpoint/2010/main" val="916806565"/>
       </p:ext>
     </p:extLst>
   </p:cSld>
@@ -3255,7 +3963,11 @@
           <a:p>
             <a:r>
               <a:rPr lang="en-US" dirty="0"/>
-              <a:t>Project Proposal Updates</a:t>
+              <a:t>Project Proposal </a:t>
+            </a:r>
+            <a:r>
+              <a:rPr lang="en-US" i="1" dirty="0"/>
+              <a:t>Updates</a:t>
             </a:r>
           </a:p>
         </p:txBody>
@@ -3288,9 +4000,55 @@
           </a:bodyPr>
           <a:lstStyle/>
           <a:p>
+            <a:r>
+              <a:rPr lang="en-US" dirty="0"/>
+              <a:t>Spreadsheet to help organize the groups</a:t>
+            </a:r>
+          </a:p>
+          <a:p>
             <a:pPr marL="0" indent="0">
               <a:buNone/>
             </a:pPr>
+            <a:r>
+              <a:rPr lang="en-US" sz="1200" dirty="0">
+                <a:hlinkClick r:id="rId2"/>
+              </a:rPr>
+              <a:t>https://docs.google.com/spreadsheets/d/1RqVF_3GTnQsld3ikscjSPqKV1eLFaDH0qI4oAXluFZs/edit?usp=sharing</a:t>
+            </a:r>
+            <a:endParaRPr lang="en-US" sz="1200" dirty="0"/>
+          </a:p>
+          <a:p>
+            <a:r>
+              <a:rPr lang="en-US" dirty="0"/>
+              <a:t>One idea for a project:</a:t>
+            </a:r>
+          </a:p>
+          <a:p>
+            <a:pPr lvl="1"/>
+            <a:r>
+              <a:rPr lang="en-US" dirty="0"/>
+              <a:t>Determine in multiple years if there is a statistically significant difference (</a:t>
+            </a:r>
+            <a:r>
+              <a:rPr lang="en-US" i="1" dirty="0"/>
+              <a:t>paired sample t-test</a:t>
+            </a:r>
+            <a:r>
+              <a:rPr lang="en-US" dirty="0"/>
+              <a:t>) between the aggregated </a:t>
+            </a:r>
+            <a:r>
+              <a:rPr lang="en-US" dirty="0" err="1"/>
+              <a:t>LandScan</a:t>
+            </a:r>
+            <a:r>
+              <a:rPr lang="en-US" dirty="0"/>
+              <a:t> population estimates and the Census residential population (where people live) at multiple census geometric boundary levels (tract, county, zip-code</a:t>
+            </a:r>
+            <a:r>
+              <a:rPr lang="en-US"/>
+              <a:t>, etc.)</a:t>
+            </a:r>
             <a:endParaRPr lang="en-US" dirty="0"/>
           </a:p>
         </p:txBody>
@@ -3328,6 +4086,1086 @@
     <p:extLst>
       <p:ext uri="{BB962C8B-B14F-4D97-AF65-F5344CB8AC3E}">
         <p14:creationId xmlns:p14="http://schemas.microsoft.com/office/powerpoint/2010/main" val="3122879713"/>
+      </p:ext>
+    </p:extLst>
+  </p:cSld>
+  <p:clrMapOvr>
+    <a:masterClrMapping/>
+  </p:clrMapOvr>
+</p:sld>
+</file>
+
+<file path=ppt/slides/slide20.xml><?xml version="1.0" encoding="utf-8"?>
+<p:sld xmlns:a="http://schemas.openxmlformats.org/drawingml/2006/main" xmlns:r="http://schemas.openxmlformats.org/officeDocument/2006/relationships" xmlns:p="http://schemas.openxmlformats.org/presentationml/2006/main">
+  <p:cSld>
+    <p:spTree>
+      <p:nvGrpSpPr>
+        <p:cNvPr id="1" name=""/>
+        <p:cNvGrpSpPr/>
+        <p:nvPr/>
+      </p:nvGrpSpPr>
+      <p:grpSpPr>
+        <a:xfrm>
+          <a:off x="0" y="0"/>
+          <a:ext cx="0" cy="0"/>
+          <a:chOff x="0" y="0"/>
+          <a:chExt cx="0" cy="0"/>
+        </a:xfrm>
+      </p:grpSpPr>
+      <p:sp>
+        <p:nvSpPr>
+          <p:cNvPr id="2" name="Title 1">
+            <a:extLst>
+              <a:ext uri="{FF2B5EF4-FFF2-40B4-BE49-F238E27FC236}">
+                <a16:creationId xmlns:a16="http://schemas.microsoft.com/office/drawing/2014/main" id="{20F45FB5-2A4E-82FF-054C-159B31C3F9A6}"/>
+              </a:ext>
+            </a:extLst>
+          </p:cNvPr>
+          <p:cNvSpPr>
+            <a:spLocks noGrp="1"/>
+          </p:cNvSpPr>
+          <p:nvPr>
+            <p:ph type="title"/>
+          </p:nvPr>
+        </p:nvSpPr>
+        <p:spPr/>
+        <p:txBody>
+          <a:bodyPr/>
+          <a:lstStyle/>
+          <a:p>
+            <a:endParaRPr lang="en-US"/>
+          </a:p>
+        </p:txBody>
+      </p:sp>
+      <p:sp>
+        <p:nvSpPr>
+          <p:cNvPr id="3" name="Content Placeholder 2">
+            <a:extLst>
+              <a:ext uri="{FF2B5EF4-FFF2-40B4-BE49-F238E27FC236}">
+                <a16:creationId xmlns:a16="http://schemas.microsoft.com/office/drawing/2014/main" id="{F0E2A95E-8B3D-F6E3-F3A4-A92D41FC6EF8}"/>
+              </a:ext>
+            </a:extLst>
+          </p:cNvPr>
+          <p:cNvSpPr>
+            <a:spLocks noGrp="1"/>
+          </p:cNvSpPr>
+          <p:nvPr>
+            <p:ph idx="1"/>
+          </p:nvPr>
+        </p:nvSpPr>
+        <p:spPr/>
+        <p:txBody>
+          <a:bodyPr/>
+          <a:lstStyle/>
+          <a:p>
+            <a:endParaRPr lang="en-US"/>
+          </a:p>
+        </p:txBody>
+      </p:sp>
+      <p:sp>
+        <p:nvSpPr>
+          <p:cNvPr id="4" name="Slide Number Placeholder 3">
+            <a:extLst>
+              <a:ext uri="{FF2B5EF4-FFF2-40B4-BE49-F238E27FC236}">
+                <a16:creationId xmlns:a16="http://schemas.microsoft.com/office/drawing/2014/main" id="{015E8E2B-704B-9D42-F0E4-755195ECE135}"/>
+              </a:ext>
+            </a:extLst>
+          </p:cNvPr>
+          <p:cNvSpPr>
+            <a:spLocks noGrp="1"/>
+          </p:cNvSpPr>
+          <p:nvPr>
+            <p:ph type="sldNum" sz="quarter" idx="12"/>
+          </p:nvPr>
+        </p:nvSpPr>
+        <p:spPr/>
+        <p:txBody>
+          <a:bodyPr/>
+          <a:lstStyle/>
+          <a:p>
+            <a:fld id="{C0343C75-1924-D247-85A3-0CB62E67E5D1}" type="slidenum">
+              <a:rPr lang="en-US" smtClean="0"/>
+              <a:t>20</a:t>
+            </a:fld>
+            <a:endParaRPr lang="en-US"/>
+          </a:p>
+        </p:txBody>
+      </p:sp>
+    </p:spTree>
+    <p:extLst>
+      <p:ext uri="{BB962C8B-B14F-4D97-AF65-F5344CB8AC3E}">
+        <p14:creationId xmlns:p14="http://schemas.microsoft.com/office/powerpoint/2010/main" val="564498531"/>
+      </p:ext>
+    </p:extLst>
+  </p:cSld>
+  <p:clrMapOvr>
+    <a:masterClrMapping/>
+  </p:clrMapOvr>
+</p:sld>
+</file>
+
+<file path=ppt/slides/slide21.xml><?xml version="1.0" encoding="utf-8"?>
+<p:sld xmlns:a="http://schemas.openxmlformats.org/drawingml/2006/main" xmlns:r="http://schemas.openxmlformats.org/officeDocument/2006/relationships" xmlns:p="http://schemas.openxmlformats.org/presentationml/2006/main">
+  <p:cSld>
+    <p:spTree>
+      <p:nvGrpSpPr>
+        <p:cNvPr id="1" name="">
+          <a:extLst>
+            <a:ext uri="{FF2B5EF4-FFF2-40B4-BE49-F238E27FC236}">
+              <a16:creationId xmlns:a16="http://schemas.microsoft.com/office/drawing/2014/main" id="{984320E9-B191-430C-0C03-2CE73DB173CC}"/>
+            </a:ext>
+          </a:extLst>
+        </p:cNvPr>
+        <p:cNvGrpSpPr/>
+        <p:nvPr/>
+      </p:nvGrpSpPr>
+      <p:grpSpPr>
+        <a:xfrm>
+          <a:off x="0" y="0"/>
+          <a:ext cx="0" cy="0"/>
+          <a:chOff x="0" y="0"/>
+          <a:chExt cx="0" cy="0"/>
+        </a:xfrm>
+      </p:grpSpPr>
+      <p:sp>
+        <p:nvSpPr>
+          <p:cNvPr id="5" name="Title 4">
+            <a:extLst>
+              <a:ext uri="{FF2B5EF4-FFF2-40B4-BE49-F238E27FC236}">
+                <a16:creationId xmlns:a16="http://schemas.microsoft.com/office/drawing/2014/main" id="{FD6680E6-21FB-B9FC-B921-FB08AF5D8B57}"/>
+              </a:ext>
+            </a:extLst>
+          </p:cNvPr>
+          <p:cNvSpPr>
+            <a:spLocks noGrp="1"/>
+          </p:cNvSpPr>
+          <p:nvPr>
+            <p:ph type="title"/>
+          </p:nvPr>
+        </p:nvSpPr>
+        <p:spPr/>
+        <p:txBody>
+          <a:bodyPr/>
+          <a:lstStyle/>
+          <a:p>
+            <a:r>
+              <a:rPr lang="en-US" dirty="0"/>
+              <a:t>Animated maps</a:t>
+            </a:r>
+          </a:p>
+        </p:txBody>
+      </p:sp>
+      <p:sp>
+        <p:nvSpPr>
+          <p:cNvPr id="4" name="Slide Number Placeholder 3">
+            <a:extLst>
+              <a:ext uri="{FF2B5EF4-FFF2-40B4-BE49-F238E27FC236}">
+                <a16:creationId xmlns:a16="http://schemas.microsoft.com/office/drawing/2014/main" id="{FAE202AD-F5C4-00F7-743A-FA6ECFBC4A76}"/>
+              </a:ext>
+            </a:extLst>
+          </p:cNvPr>
+          <p:cNvSpPr>
+            <a:spLocks noGrp="1"/>
+          </p:cNvSpPr>
+          <p:nvPr>
+            <p:ph type="sldNum" sz="quarter" idx="12"/>
+          </p:nvPr>
+        </p:nvSpPr>
+        <p:spPr/>
+        <p:txBody>
+          <a:bodyPr/>
+          <a:lstStyle/>
+          <a:p>
+            <a:fld id="{C0343C75-1924-D247-85A3-0CB62E67E5D1}" type="slidenum">
+              <a:rPr lang="en-US" smtClean="0"/>
+              <a:t>21</a:t>
+            </a:fld>
+            <a:endParaRPr lang="en-US"/>
+          </a:p>
+        </p:txBody>
+      </p:sp>
+    </p:spTree>
+    <p:extLst>
+      <p:ext uri="{BB962C8B-B14F-4D97-AF65-F5344CB8AC3E}">
+        <p14:creationId xmlns:p14="http://schemas.microsoft.com/office/powerpoint/2010/main" val="2932111394"/>
+      </p:ext>
+    </p:extLst>
+  </p:cSld>
+  <p:clrMapOvr>
+    <a:masterClrMapping/>
+  </p:clrMapOvr>
+</p:sld>
+</file>
+
+<file path=ppt/slides/slide22.xml><?xml version="1.0" encoding="utf-8"?>
+<p:sld xmlns:a="http://schemas.openxmlformats.org/drawingml/2006/main" xmlns:r="http://schemas.openxmlformats.org/officeDocument/2006/relationships" xmlns:p="http://schemas.openxmlformats.org/presentationml/2006/main">
+  <p:cSld>
+    <p:spTree>
+      <p:nvGrpSpPr>
+        <p:cNvPr id="1" name="">
+          <a:extLst>
+            <a:ext uri="{FF2B5EF4-FFF2-40B4-BE49-F238E27FC236}">
+              <a16:creationId xmlns:a16="http://schemas.microsoft.com/office/drawing/2014/main" id="{DAABE119-69AC-2958-CE32-2C414B4DEB3C}"/>
+            </a:ext>
+          </a:extLst>
+        </p:cNvPr>
+        <p:cNvGrpSpPr/>
+        <p:nvPr/>
+      </p:nvGrpSpPr>
+      <p:grpSpPr>
+        <a:xfrm>
+          <a:off x="0" y="0"/>
+          <a:ext cx="0" cy="0"/>
+          <a:chOff x="0" y="0"/>
+          <a:chExt cx="0" cy="0"/>
+        </a:xfrm>
+      </p:grpSpPr>
+      <p:sp>
+        <p:nvSpPr>
+          <p:cNvPr id="2" name="Title 1">
+            <a:extLst>
+              <a:ext uri="{FF2B5EF4-FFF2-40B4-BE49-F238E27FC236}">
+                <a16:creationId xmlns:a16="http://schemas.microsoft.com/office/drawing/2014/main" id="{9E0ED7C4-A5EA-C3C4-91E9-186BC945AB8A}"/>
+              </a:ext>
+            </a:extLst>
+          </p:cNvPr>
+          <p:cNvSpPr>
+            <a:spLocks noGrp="1"/>
+          </p:cNvSpPr>
+          <p:nvPr>
+            <p:ph type="title"/>
+          </p:nvPr>
+        </p:nvSpPr>
+        <p:spPr/>
+        <p:txBody>
+          <a:bodyPr/>
+          <a:lstStyle/>
+          <a:p>
+            <a:endParaRPr lang="en-US"/>
+          </a:p>
+        </p:txBody>
+      </p:sp>
+      <p:sp>
+        <p:nvSpPr>
+          <p:cNvPr id="3" name="Content Placeholder 2">
+            <a:extLst>
+              <a:ext uri="{FF2B5EF4-FFF2-40B4-BE49-F238E27FC236}">
+                <a16:creationId xmlns:a16="http://schemas.microsoft.com/office/drawing/2014/main" id="{47331457-74FC-5DB0-4CD9-FAEAD5F7FEC5}"/>
+              </a:ext>
+            </a:extLst>
+          </p:cNvPr>
+          <p:cNvSpPr>
+            <a:spLocks noGrp="1"/>
+          </p:cNvSpPr>
+          <p:nvPr>
+            <p:ph idx="1"/>
+          </p:nvPr>
+        </p:nvSpPr>
+        <p:spPr/>
+        <p:txBody>
+          <a:bodyPr/>
+          <a:lstStyle/>
+          <a:p>
+            <a:endParaRPr lang="en-US"/>
+          </a:p>
+        </p:txBody>
+      </p:sp>
+      <p:sp>
+        <p:nvSpPr>
+          <p:cNvPr id="4" name="Slide Number Placeholder 3">
+            <a:extLst>
+              <a:ext uri="{FF2B5EF4-FFF2-40B4-BE49-F238E27FC236}">
+                <a16:creationId xmlns:a16="http://schemas.microsoft.com/office/drawing/2014/main" id="{0152F613-5612-6D1C-A596-EF36633EBB5B}"/>
+              </a:ext>
+            </a:extLst>
+          </p:cNvPr>
+          <p:cNvSpPr>
+            <a:spLocks noGrp="1"/>
+          </p:cNvSpPr>
+          <p:nvPr>
+            <p:ph type="sldNum" sz="quarter" idx="12"/>
+          </p:nvPr>
+        </p:nvSpPr>
+        <p:spPr/>
+        <p:txBody>
+          <a:bodyPr/>
+          <a:lstStyle/>
+          <a:p>
+            <a:fld id="{C0343C75-1924-D247-85A3-0CB62E67E5D1}" type="slidenum">
+              <a:rPr lang="en-US" smtClean="0"/>
+              <a:t>22</a:t>
+            </a:fld>
+            <a:endParaRPr lang="en-US"/>
+          </a:p>
+        </p:txBody>
+      </p:sp>
+    </p:spTree>
+    <p:extLst>
+      <p:ext uri="{BB962C8B-B14F-4D97-AF65-F5344CB8AC3E}">
+        <p14:creationId xmlns:p14="http://schemas.microsoft.com/office/powerpoint/2010/main" val="385475354"/>
+      </p:ext>
+    </p:extLst>
+  </p:cSld>
+  <p:clrMapOvr>
+    <a:masterClrMapping/>
+  </p:clrMapOvr>
+</p:sld>
+</file>
+
+<file path=ppt/slides/slide23.xml><?xml version="1.0" encoding="utf-8"?>
+<p:sld xmlns:a="http://schemas.openxmlformats.org/drawingml/2006/main" xmlns:r="http://schemas.openxmlformats.org/officeDocument/2006/relationships" xmlns:p="http://schemas.openxmlformats.org/presentationml/2006/main">
+  <p:cSld>
+    <p:spTree>
+      <p:nvGrpSpPr>
+        <p:cNvPr id="1" name="">
+          <a:extLst>
+            <a:ext uri="{FF2B5EF4-FFF2-40B4-BE49-F238E27FC236}">
+              <a16:creationId xmlns:a16="http://schemas.microsoft.com/office/drawing/2014/main" id="{901F5D6C-A8DA-73B8-2114-F48DD715F174}"/>
+            </a:ext>
+          </a:extLst>
+        </p:cNvPr>
+        <p:cNvGrpSpPr/>
+        <p:nvPr/>
+      </p:nvGrpSpPr>
+      <p:grpSpPr>
+        <a:xfrm>
+          <a:off x="0" y="0"/>
+          <a:ext cx="0" cy="0"/>
+          <a:chOff x="0" y="0"/>
+          <a:chExt cx="0" cy="0"/>
+        </a:xfrm>
+      </p:grpSpPr>
+      <p:sp>
+        <p:nvSpPr>
+          <p:cNvPr id="5" name="Title 4">
+            <a:extLst>
+              <a:ext uri="{FF2B5EF4-FFF2-40B4-BE49-F238E27FC236}">
+                <a16:creationId xmlns:a16="http://schemas.microsoft.com/office/drawing/2014/main" id="{70359EC1-5698-4292-410B-7F0358B35B0C}"/>
+              </a:ext>
+            </a:extLst>
+          </p:cNvPr>
+          <p:cNvSpPr>
+            <a:spLocks noGrp="1"/>
+          </p:cNvSpPr>
+          <p:nvPr>
+            <p:ph type="title"/>
+          </p:nvPr>
+        </p:nvSpPr>
+        <p:spPr/>
+        <p:txBody>
+          <a:bodyPr/>
+          <a:lstStyle/>
+          <a:p>
+            <a:r>
+              <a:rPr lang="en-US" dirty="0"/>
+              <a:t>Interactive maps</a:t>
+            </a:r>
+          </a:p>
+        </p:txBody>
+      </p:sp>
+      <p:sp>
+        <p:nvSpPr>
+          <p:cNvPr id="4" name="Slide Number Placeholder 3">
+            <a:extLst>
+              <a:ext uri="{FF2B5EF4-FFF2-40B4-BE49-F238E27FC236}">
+                <a16:creationId xmlns:a16="http://schemas.microsoft.com/office/drawing/2014/main" id="{A49868F4-0621-D21D-0EF3-2F2D268C47DF}"/>
+              </a:ext>
+            </a:extLst>
+          </p:cNvPr>
+          <p:cNvSpPr>
+            <a:spLocks noGrp="1"/>
+          </p:cNvSpPr>
+          <p:nvPr>
+            <p:ph type="sldNum" sz="quarter" idx="12"/>
+          </p:nvPr>
+        </p:nvSpPr>
+        <p:spPr/>
+        <p:txBody>
+          <a:bodyPr/>
+          <a:lstStyle/>
+          <a:p>
+            <a:fld id="{C0343C75-1924-D247-85A3-0CB62E67E5D1}" type="slidenum">
+              <a:rPr lang="en-US" smtClean="0"/>
+              <a:t>23</a:t>
+            </a:fld>
+            <a:endParaRPr lang="en-US"/>
+          </a:p>
+        </p:txBody>
+      </p:sp>
+    </p:spTree>
+    <p:extLst>
+      <p:ext uri="{BB962C8B-B14F-4D97-AF65-F5344CB8AC3E}">
+        <p14:creationId xmlns:p14="http://schemas.microsoft.com/office/powerpoint/2010/main" val="925375383"/>
+      </p:ext>
+    </p:extLst>
+  </p:cSld>
+  <p:clrMapOvr>
+    <a:masterClrMapping/>
+  </p:clrMapOvr>
+</p:sld>
+</file>
+
+<file path=ppt/slides/slide24.xml><?xml version="1.0" encoding="utf-8"?>
+<p:sld xmlns:a="http://schemas.openxmlformats.org/drawingml/2006/main" xmlns:r="http://schemas.openxmlformats.org/officeDocument/2006/relationships" xmlns:p="http://schemas.openxmlformats.org/presentationml/2006/main">
+  <p:cSld>
+    <p:spTree>
+      <p:nvGrpSpPr>
+        <p:cNvPr id="1" name="">
+          <a:extLst>
+            <a:ext uri="{FF2B5EF4-FFF2-40B4-BE49-F238E27FC236}">
+              <a16:creationId xmlns:a16="http://schemas.microsoft.com/office/drawing/2014/main" id="{A8A22A68-EF06-100A-3BF1-68AFE22C9C72}"/>
+            </a:ext>
+          </a:extLst>
+        </p:cNvPr>
+        <p:cNvGrpSpPr/>
+        <p:nvPr/>
+      </p:nvGrpSpPr>
+      <p:grpSpPr>
+        <a:xfrm>
+          <a:off x="0" y="0"/>
+          <a:ext cx="0" cy="0"/>
+          <a:chOff x="0" y="0"/>
+          <a:chExt cx="0" cy="0"/>
+        </a:xfrm>
+      </p:grpSpPr>
+      <p:sp>
+        <p:nvSpPr>
+          <p:cNvPr id="2" name="Title 1">
+            <a:extLst>
+              <a:ext uri="{FF2B5EF4-FFF2-40B4-BE49-F238E27FC236}">
+                <a16:creationId xmlns:a16="http://schemas.microsoft.com/office/drawing/2014/main" id="{683A898A-1A9C-6725-65FD-ADCF83F275B2}"/>
+              </a:ext>
+            </a:extLst>
+          </p:cNvPr>
+          <p:cNvSpPr>
+            <a:spLocks noGrp="1"/>
+          </p:cNvSpPr>
+          <p:nvPr>
+            <p:ph type="title"/>
+          </p:nvPr>
+        </p:nvSpPr>
+        <p:spPr/>
+        <p:txBody>
+          <a:bodyPr/>
+          <a:lstStyle/>
+          <a:p>
+            <a:endParaRPr lang="en-US"/>
+          </a:p>
+        </p:txBody>
+      </p:sp>
+      <p:sp>
+        <p:nvSpPr>
+          <p:cNvPr id="3" name="Content Placeholder 2">
+            <a:extLst>
+              <a:ext uri="{FF2B5EF4-FFF2-40B4-BE49-F238E27FC236}">
+                <a16:creationId xmlns:a16="http://schemas.microsoft.com/office/drawing/2014/main" id="{A0E120AB-187D-B899-1A3E-7CC12F6C38EB}"/>
+              </a:ext>
+            </a:extLst>
+          </p:cNvPr>
+          <p:cNvSpPr>
+            <a:spLocks noGrp="1"/>
+          </p:cNvSpPr>
+          <p:nvPr>
+            <p:ph idx="1"/>
+          </p:nvPr>
+        </p:nvSpPr>
+        <p:spPr/>
+        <p:txBody>
+          <a:bodyPr/>
+          <a:lstStyle/>
+          <a:p>
+            <a:endParaRPr lang="en-US"/>
+          </a:p>
+        </p:txBody>
+      </p:sp>
+      <p:sp>
+        <p:nvSpPr>
+          <p:cNvPr id="4" name="Slide Number Placeholder 3">
+            <a:extLst>
+              <a:ext uri="{FF2B5EF4-FFF2-40B4-BE49-F238E27FC236}">
+                <a16:creationId xmlns:a16="http://schemas.microsoft.com/office/drawing/2014/main" id="{6F1CC0E9-0E1A-31B5-4EAA-0970B842600B}"/>
+              </a:ext>
+            </a:extLst>
+          </p:cNvPr>
+          <p:cNvSpPr>
+            <a:spLocks noGrp="1"/>
+          </p:cNvSpPr>
+          <p:nvPr>
+            <p:ph type="sldNum" sz="quarter" idx="12"/>
+          </p:nvPr>
+        </p:nvSpPr>
+        <p:spPr/>
+        <p:txBody>
+          <a:bodyPr/>
+          <a:lstStyle/>
+          <a:p>
+            <a:fld id="{C0343C75-1924-D247-85A3-0CB62E67E5D1}" type="slidenum">
+              <a:rPr lang="en-US" smtClean="0"/>
+              <a:t>24</a:t>
+            </a:fld>
+            <a:endParaRPr lang="en-US"/>
+          </a:p>
+        </p:txBody>
+      </p:sp>
+    </p:spTree>
+    <p:extLst>
+      <p:ext uri="{BB962C8B-B14F-4D97-AF65-F5344CB8AC3E}">
+        <p14:creationId xmlns:p14="http://schemas.microsoft.com/office/powerpoint/2010/main" val="4250734745"/>
+      </p:ext>
+    </p:extLst>
+  </p:cSld>
+  <p:clrMapOvr>
+    <a:masterClrMapping/>
+  </p:clrMapOvr>
+</p:sld>
+</file>
+
+<file path=ppt/slides/slide25.xml><?xml version="1.0" encoding="utf-8"?>
+<p:sld xmlns:a="http://schemas.openxmlformats.org/drawingml/2006/main" xmlns:r="http://schemas.openxmlformats.org/officeDocument/2006/relationships" xmlns:p="http://schemas.openxmlformats.org/presentationml/2006/main">
+  <p:cSld>
+    <p:spTree>
+      <p:nvGrpSpPr>
+        <p:cNvPr id="1" name="">
+          <a:extLst>
+            <a:ext uri="{FF2B5EF4-FFF2-40B4-BE49-F238E27FC236}">
+              <a16:creationId xmlns:a16="http://schemas.microsoft.com/office/drawing/2014/main" id="{B2F57D37-5C69-905D-6C0A-B3699FC9571A}"/>
+            </a:ext>
+          </a:extLst>
+        </p:cNvPr>
+        <p:cNvGrpSpPr/>
+        <p:nvPr/>
+      </p:nvGrpSpPr>
+      <p:grpSpPr>
+        <a:xfrm>
+          <a:off x="0" y="0"/>
+          <a:ext cx="0" cy="0"/>
+          <a:chOff x="0" y="0"/>
+          <a:chExt cx="0" cy="0"/>
+        </a:xfrm>
+      </p:grpSpPr>
+      <p:sp>
+        <p:nvSpPr>
+          <p:cNvPr id="5" name="Title 4">
+            <a:extLst>
+              <a:ext uri="{FF2B5EF4-FFF2-40B4-BE49-F238E27FC236}">
+                <a16:creationId xmlns:a16="http://schemas.microsoft.com/office/drawing/2014/main" id="{2C2500EA-3E20-82BD-2C3F-E9229E07712F}"/>
+              </a:ext>
+            </a:extLst>
+          </p:cNvPr>
+          <p:cNvSpPr>
+            <a:spLocks noGrp="1"/>
+          </p:cNvSpPr>
+          <p:nvPr>
+            <p:ph type="title"/>
+          </p:nvPr>
+        </p:nvSpPr>
+        <p:spPr/>
+        <p:txBody>
+          <a:bodyPr/>
+          <a:lstStyle/>
+          <a:p>
+            <a:r>
+              <a:rPr lang="en-US" dirty="0"/>
+              <a:t>Mapping applications</a:t>
+            </a:r>
+          </a:p>
+        </p:txBody>
+      </p:sp>
+      <p:sp>
+        <p:nvSpPr>
+          <p:cNvPr id="4" name="Slide Number Placeholder 3">
+            <a:extLst>
+              <a:ext uri="{FF2B5EF4-FFF2-40B4-BE49-F238E27FC236}">
+                <a16:creationId xmlns:a16="http://schemas.microsoft.com/office/drawing/2014/main" id="{DC217F24-7728-5B60-D9E5-2CCC802DFE90}"/>
+              </a:ext>
+            </a:extLst>
+          </p:cNvPr>
+          <p:cNvSpPr>
+            <a:spLocks noGrp="1"/>
+          </p:cNvSpPr>
+          <p:nvPr>
+            <p:ph type="sldNum" sz="quarter" idx="12"/>
+          </p:nvPr>
+        </p:nvSpPr>
+        <p:spPr/>
+        <p:txBody>
+          <a:bodyPr/>
+          <a:lstStyle/>
+          <a:p>
+            <a:fld id="{C0343C75-1924-D247-85A3-0CB62E67E5D1}" type="slidenum">
+              <a:rPr lang="en-US" smtClean="0"/>
+              <a:t>25</a:t>
+            </a:fld>
+            <a:endParaRPr lang="en-US"/>
+          </a:p>
+        </p:txBody>
+      </p:sp>
+    </p:spTree>
+    <p:extLst>
+      <p:ext uri="{BB962C8B-B14F-4D97-AF65-F5344CB8AC3E}">
+        <p14:creationId xmlns:p14="http://schemas.microsoft.com/office/powerpoint/2010/main" val="3273839397"/>
+      </p:ext>
+    </p:extLst>
+  </p:cSld>
+  <p:clrMapOvr>
+    <a:masterClrMapping/>
+  </p:clrMapOvr>
+</p:sld>
+</file>
+
+<file path=ppt/slides/slide26.xml><?xml version="1.0" encoding="utf-8"?>
+<p:sld xmlns:a="http://schemas.openxmlformats.org/drawingml/2006/main" xmlns:r="http://schemas.openxmlformats.org/officeDocument/2006/relationships" xmlns:p="http://schemas.openxmlformats.org/presentationml/2006/main">
+  <p:cSld>
+    <p:spTree>
+      <p:nvGrpSpPr>
+        <p:cNvPr id="1" name="">
+          <a:extLst>
+            <a:ext uri="{FF2B5EF4-FFF2-40B4-BE49-F238E27FC236}">
+              <a16:creationId xmlns:a16="http://schemas.microsoft.com/office/drawing/2014/main" id="{12328F41-73AF-2FE0-18CE-2743A6437028}"/>
+            </a:ext>
+          </a:extLst>
+        </p:cNvPr>
+        <p:cNvGrpSpPr/>
+        <p:nvPr/>
+      </p:nvGrpSpPr>
+      <p:grpSpPr>
+        <a:xfrm>
+          <a:off x="0" y="0"/>
+          <a:ext cx="0" cy="0"/>
+          <a:chOff x="0" y="0"/>
+          <a:chExt cx="0" cy="0"/>
+        </a:xfrm>
+      </p:grpSpPr>
+      <p:sp>
+        <p:nvSpPr>
+          <p:cNvPr id="2" name="Title 1">
+            <a:extLst>
+              <a:ext uri="{FF2B5EF4-FFF2-40B4-BE49-F238E27FC236}">
+                <a16:creationId xmlns:a16="http://schemas.microsoft.com/office/drawing/2014/main" id="{C9A0FB9D-E7E4-FE1B-1A19-9A2E846826E1}"/>
+              </a:ext>
+            </a:extLst>
+          </p:cNvPr>
+          <p:cNvSpPr>
+            <a:spLocks noGrp="1"/>
+          </p:cNvSpPr>
+          <p:nvPr>
+            <p:ph type="title"/>
+          </p:nvPr>
+        </p:nvSpPr>
+        <p:spPr/>
+        <p:txBody>
+          <a:bodyPr/>
+          <a:lstStyle/>
+          <a:p>
+            <a:endParaRPr lang="en-US"/>
+          </a:p>
+        </p:txBody>
+      </p:sp>
+      <p:sp>
+        <p:nvSpPr>
+          <p:cNvPr id="3" name="Content Placeholder 2">
+            <a:extLst>
+              <a:ext uri="{FF2B5EF4-FFF2-40B4-BE49-F238E27FC236}">
+                <a16:creationId xmlns:a16="http://schemas.microsoft.com/office/drawing/2014/main" id="{FA9794CF-6B0A-B06F-DFF3-9A1B2BE0CA63}"/>
+              </a:ext>
+            </a:extLst>
+          </p:cNvPr>
+          <p:cNvSpPr>
+            <a:spLocks noGrp="1"/>
+          </p:cNvSpPr>
+          <p:nvPr>
+            <p:ph idx="1"/>
+          </p:nvPr>
+        </p:nvSpPr>
+        <p:spPr/>
+        <p:txBody>
+          <a:bodyPr/>
+          <a:lstStyle/>
+          <a:p>
+            <a:endParaRPr lang="en-US"/>
+          </a:p>
+        </p:txBody>
+      </p:sp>
+      <p:sp>
+        <p:nvSpPr>
+          <p:cNvPr id="4" name="Slide Number Placeholder 3">
+            <a:extLst>
+              <a:ext uri="{FF2B5EF4-FFF2-40B4-BE49-F238E27FC236}">
+                <a16:creationId xmlns:a16="http://schemas.microsoft.com/office/drawing/2014/main" id="{1FA18C70-EF25-DA32-D7F2-91859E10209B}"/>
+              </a:ext>
+            </a:extLst>
+          </p:cNvPr>
+          <p:cNvSpPr>
+            <a:spLocks noGrp="1"/>
+          </p:cNvSpPr>
+          <p:nvPr>
+            <p:ph type="sldNum" sz="quarter" idx="12"/>
+          </p:nvPr>
+        </p:nvSpPr>
+        <p:spPr/>
+        <p:txBody>
+          <a:bodyPr/>
+          <a:lstStyle/>
+          <a:p>
+            <a:fld id="{C0343C75-1924-D247-85A3-0CB62E67E5D1}" type="slidenum">
+              <a:rPr lang="en-US" smtClean="0"/>
+              <a:t>26</a:t>
+            </a:fld>
+            <a:endParaRPr lang="en-US"/>
+          </a:p>
+        </p:txBody>
+      </p:sp>
+    </p:spTree>
+    <p:extLst>
+      <p:ext uri="{BB962C8B-B14F-4D97-AF65-F5344CB8AC3E}">
+        <p14:creationId xmlns:p14="http://schemas.microsoft.com/office/powerpoint/2010/main" val="3533329453"/>
+      </p:ext>
+    </p:extLst>
+  </p:cSld>
+  <p:clrMapOvr>
+    <a:masterClrMapping/>
+  </p:clrMapOvr>
+</p:sld>
+</file>
+
+<file path=ppt/slides/slide27.xml><?xml version="1.0" encoding="utf-8"?>
+<p:sld xmlns:a="http://schemas.openxmlformats.org/drawingml/2006/main" xmlns:r="http://schemas.openxmlformats.org/officeDocument/2006/relationships" xmlns:p="http://schemas.openxmlformats.org/presentationml/2006/main">
+  <p:cSld>
+    <p:spTree>
+      <p:nvGrpSpPr>
+        <p:cNvPr id="1" name=""/>
+        <p:cNvGrpSpPr/>
+        <p:nvPr/>
+      </p:nvGrpSpPr>
+      <p:grpSpPr>
+        <a:xfrm>
+          <a:off x="0" y="0"/>
+          <a:ext cx="0" cy="0"/>
+          <a:chOff x="0" y="0"/>
+          <a:chExt cx="0" cy="0"/>
+        </a:xfrm>
+      </p:grpSpPr>
+      <p:sp>
+        <p:nvSpPr>
+          <p:cNvPr id="2" name="Title 1">
+            <a:extLst>
+              <a:ext uri="{FF2B5EF4-FFF2-40B4-BE49-F238E27FC236}">
+                <a16:creationId xmlns:a16="http://schemas.microsoft.com/office/drawing/2014/main" id="{EE1778A9-DF75-760E-5946-D5CB9BB0CCCA}"/>
+              </a:ext>
+            </a:extLst>
+          </p:cNvPr>
+          <p:cNvSpPr>
+            <a:spLocks noGrp="1"/>
+          </p:cNvSpPr>
+          <p:nvPr>
+            <p:ph type="title"/>
+          </p:nvPr>
+        </p:nvSpPr>
+        <p:spPr/>
+        <p:txBody>
+          <a:bodyPr/>
+          <a:lstStyle/>
+          <a:p>
+            <a:r>
+              <a:rPr lang="en-US" dirty="0"/>
+              <a:t>More References</a:t>
+            </a:r>
+          </a:p>
+        </p:txBody>
+      </p:sp>
+      <p:sp>
+        <p:nvSpPr>
+          <p:cNvPr id="3" name="Content Placeholder 2">
+            <a:extLst>
+              <a:ext uri="{FF2B5EF4-FFF2-40B4-BE49-F238E27FC236}">
+                <a16:creationId xmlns:a16="http://schemas.microsoft.com/office/drawing/2014/main" id="{9D8C69DB-0DB5-ECA1-24D0-4233342F2729}"/>
+              </a:ext>
+            </a:extLst>
+          </p:cNvPr>
+          <p:cNvSpPr>
+            <a:spLocks noGrp="1"/>
+          </p:cNvSpPr>
+          <p:nvPr>
+            <p:ph idx="1"/>
+          </p:nvPr>
+        </p:nvSpPr>
+        <p:spPr/>
+        <p:txBody>
+          <a:bodyPr/>
+          <a:lstStyle/>
+          <a:p>
+            <a:r>
+              <a:rPr lang="en-US" dirty="0"/>
+              <a:t>Cartographic Design Process</a:t>
+            </a:r>
+            <a:br>
+              <a:rPr lang="en-US" dirty="0"/>
+            </a:br>
+            <a:r>
+              <a:rPr lang="en-US" sz="1400" dirty="0">
+                <a:hlinkClick r:id="rId2"/>
+              </a:rPr>
+              <a:t>https://colorado.pressbooks.pub/makingmaps/chapter/cartographic-design-process/</a:t>
+            </a:r>
+            <a:endParaRPr lang="en-US" sz="1400" dirty="0"/>
+          </a:p>
+          <a:p>
+            <a:r>
+              <a:rPr lang="en-US" dirty="0"/>
+              <a:t>Crime Mapping and Spatial Data Analysis using R</a:t>
+            </a:r>
+            <a:br>
+              <a:rPr lang="en-US" dirty="0"/>
+            </a:br>
+            <a:r>
+              <a:rPr lang="en-US" sz="1400" dirty="0"/>
+              <a:t>Chapter 6 </a:t>
+            </a:r>
+            <a:r>
+              <a:rPr lang="en-US" sz="1400" b="1" dirty="0"/>
+              <a:t>Basics of cartographic design: elements of a map</a:t>
+            </a:r>
+            <a:br>
+              <a:rPr lang="en-US" sz="1400" dirty="0"/>
+            </a:br>
+            <a:r>
+              <a:rPr lang="en-US" sz="1400" dirty="0">
+                <a:hlinkClick r:id="rId3"/>
+              </a:rPr>
+              <a:t>https://maczokni.github.io/crime_mapping/basics-of-cartographic-design-elements-of-a-map.html</a:t>
+            </a:r>
+            <a:endParaRPr lang="en-US" sz="1400" dirty="0"/>
+          </a:p>
+          <a:p>
+            <a:endParaRPr lang="en-US" dirty="0"/>
+          </a:p>
+          <a:p>
+            <a:endParaRPr lang="en-US" dirty="0"/>
+          </a:p>
+        </p:txBody>
+      </p:sp>
+      <p:sp>
+        <p:nvSpPr>
+          <p:cNvPr id="4" name="Slide Number Placeholder 3">
+            <a:extLst>
+              <a:ext uri="{FF2B5EF4-FFF2-40B4-BE49-F238E27FC236}">
+                <a16:creationId xmlns:a16="http://schemas.microsoft.com/office/drawing/2014/main" id="{D2808ED0-60BE-81B0-39D1-0C0EE44FDD5E}"/>
+              </a:ext>
+            </a:extLst>
+          </p:cNvPr>
+          <p:cNvSpPr>
+            <a:spLocks noGrp="1"/>
+          </p:cNvSpPr>
+          <p:nvPr>
+            <p:ph type="sldNum" sz="quarter" idx="12"/>
+          </p:nvPr>
+        </p:nvSpPr>
+        <p:spPr/>
+        <p:txBody>
+          <a:bodyPr/>
+          <a:lstStyle/>
+          <a:p>
+            <a:fld id="{C0343C75-1924-D247-85A3-0CB62E67E5D1}" type="slidenum">
+              <a:rPr lang="en-US" smtClean="0"/>
+              <a:t>27</a:t>
+            </a:fld>
+            <a:endParaRPr lang="en-US"/>
+          </a:p>
+        </p:txBody>
+      </p:sp>
+    </p:spTree>
+    <p:extLst>
+      <p:ext uri="{BB962C8B-B14F-4D97-AF65-F5344CB8AC3E}">
+        <p14:creationId xmlns:p14="http://schemas.microsoft.com/office/powerpoint/2010/main" val="2393416786"/>
+      </p:ext>
+    </p:extLst>
+  </p:cSld>
+  <p:clrMapOvr>
+    <a:masterClrMapping/>
+  </p:clrMapOvr>
+</p:sld>
+</file>
+
+<file path=ppt/slides/slide28.xml><?xml version="1.0" encoding="utf-8"?>
+<p:sld xmlns:a="http://schemas.openxmlformats.org/drawingml/2006/main" xmlns:r="http://schemas.openxmlformats.org/officeDocument/2006/relationships" xmlns:p="http://schemas.openxmlformats.org/presentationml/2006/main">
+  <p:cSld>
+    <p:spTree>
+      <p:nvGrpSpPr>
+        <p:cNvPr id="1" name="">
+          <a:extLst>
+            <a:ext uri="{FF2B5EF4-FFF2-40B4-BE49-F238E27FC236}">
+              <a16:creationId xmlns:a16="http://schemas.microsoft.com/office/drawing/2014/main" id="{8E4E3741-84A4-3587-68D3-9D65C0A014FE}"/>
+            </a:ext>
+          </a:extLst>
+        </p:cNvPr>
+        <p:cNvGrpSpPr/>
+        <p:nvPr/>
+      </p:nvGrpSpPr>
+      <p:grpSpPr>
+        <a:xfrm>
+          <a:off x="0" y="0"/>
+          <a:ext cx="0" cy="0"/>
+          <a:chOff x="0" y="0"/>
+          <a:chExt cx="0" cy="0"/>
+        </a:xfrm>
+      </p:grpSpPr>
+      <p:sp>
+        <p:nvSpPr>
+          <p:cNvPr id="2" name="Title 1">
+            <a:extLst>
+              <a:ext uri="{FF2B5EF4-FFF2-40B4-BE49-F238E27FC236}">
+                <a16:creationId xmlns:a16="http://schemas.microsoft.com/office/drawing/2014/main" id="{B1B6800B-4DDB-E29C-61D8-221674B1EDAB}"/>
+              </a:ext>
+            </a:extLst>
+          </p:cNvPr>
+          <p:cNvSpPr>
+            <a:spLocks noGrp="1"/>
+          </p:cNvSpPr>
+          <p:nvPr>
+            <p:ph type="title"/>
+          </p:nvPr>
+        </p:nvSpPr>
+        <p:spPr/>
+        <p:txBody>
+          <a:bodyPr/>
+          <a:lstStyle/>
+          <a:p>
+            <a:r>
+              <a:rPr lang="en-US" dirty="0"/>
+              <a:t>Next</a:t>
+            </a:r>
+          </a:p>
+        </p:txBody>
+      </p:sp>
+      <p:sp>
+        <p:nvSpPr>
+          <p:cNvPr id="3" name="Content Placeholder 2">
+            <a:extLst>
+              <a:ext uri="{FF2B5EF4-FFF2-40B4-BE49-F238E27FC236}">
+                <a16:creationId xmlns:a16="http://schemas.microsoft.com/office/drawing/2014/main" id="{38739DCE-20B0-86B8-B3DF-D3CD62E73B09}"/>
+              </a:ext>
+            </a:extLst>
+          </p:cNvPr>
+          <p:cNvSpPr>
+            <a:spLocks noGrp="1"/>
+          </p:cNvSpPr>
+          <p:nvPr>
+            <p:ph idx="1"/>
+          </p:nvPr>
+        </p:nvSpPr>
+        <p:spPr/>
+        <p:txBody>
+          <a:bodyPr/>
+          <a:lstStyle/>
+          <a:p>
+            <a:r>
+              <a:rPr lang="en-US" dirty="0"/>
+              <a:t>Getting started with statistical learning</a:t>
+            </a:r>
+          </a:p>
+          <a:p>
+            <a:pPr lvl="1"/>
+            <a:r>
+              <a:rPr lang="en-US" dirty="0"/>
+              <a:t>Exploratory spatial data analysis</a:t>
+            </a:r>
+            <a:br>
+              <a:rPr lang="en-US" dirty="0"/>
+            </a:br>
+            <a:r>
+              <a:rPr lang="en-US" sz="1600" dirty="0">
+                <a:hlinkClick r:id="rId2"/>
+              </a:rPr>
+              <a:t>https://cran.r-project.org/web/packages/geostan/vignettes/measuring-sa.html</a:t>
+            </a:r>
+            <a:endParaRPr lang="en-US" sz="1600" dirty="0"/>
+          </a:p>
+          <a:p>
+            <a:pPr lvl="1"/>
+            <a:r>
+              <a:rPr lang="en-US" dirty="0"/>
+              <a:t>Measures of spatial autocorrelation</a:t>
+            </a:r>
+            <a:br>
+              <a:rPr lang="en-US" dirty="0"/>
+            </a:br>
+            <a:r>
+              <a:rPr lang="en-US" sz="1600" dirty="0">
+                <a:hlinkClick r:id="rId3"/>
+              </a:rPr>
+              <a:t>https://r-spatial.org/book/15-Measures.html</a:t>
+            </a:r>
+            <a:endParaRPr lang="en-US" sz="1600" dirty="0"/>
+          </a:p>
+          <a:p>
+            <a:pPr lvl="1"/>
+            <a:r>
+              <a:rPr lang="en-US" dirty="0"/>
+              <a:t>Point pattern analysis</a:t>
+            </a:r>
+            <a:br>
+              <a:rPr lang="en-US" dirty="0"/>
+            </a:br>
+            <a:r>
+              <a:rPr lang="en-US" sz="1600" dirty="0">
+                <a:hlinkClick r:id="rId4"/>
+              </a:rPr>
+              <a:t>https://r-spatial.org/book/11-PointPattern.html</a:t>
+            </a:r>
+            <a:endParaRPr lang="en-US" dirty="0"/>
+          </a:p>
+          <a:p>
+            <a:pPr lvl="1"/>
+            <a:r>
+              <a:rPr lang="en-US" dirty="0"/>
+              <a:t>Spatial interpolation</a:t>
+            </a:r>
+            <a:br>
+              <a:rPr lang="en-US" dirty="0"/>
+            </a:br>
+            <a:r>
+              <a:rPr lang="en-US" sz="1600" dirty="0">
+                <a:hlinkClick r:id="rId5"/>
+              </a:rPr>
+              <a:t>https://r-spatial.org/book/12-Interpolation.html</a:t>
+            </a:r>
+            <a:endParaRPr lang="en-US" dirty="0"/>
+          </a:p>
+        </p:txBody>
+      </p:sp>
+      <p:sp>
+        <p:nvSpPr>
+          <p:cNvPr id="4" name="Slide Number Placeholder 3">
+            <a:extLst>
+              <a:ext uri="{FF2B5EF4-FFF2-40B4-BE49-F238E27FC236}">
+                <a16:creationId xmlns:a16="http://schemas.microsoft.com/office/drawing/2014/main" id="{B982C76C-A760-A154-6CE6-5A0BE42A67AC}"/>
+              </a:ext>
+            </a:extLst>
+          </p:cNvPr>
+          <p:cNvSpPr>
+            <a:spLocks noGrp="1"/>
+          </p:cNvSpPr>
+          <p:nvPr>
+            <p:ph type="sldNum" sz="quarter" idx="12"/>
+          </p:nvPr>
+        </p:nvSpPr>
+        <p:spPr/>
+        <p:txBody>
+          <a:bodyPr/>
+          <a:lstStyle/>
+          <a:p>
+            <a:fld id="{C0343C75-1924-D247-85A3-0CB62E67E5D1}" type="slidenum">
+              <a:rPr lang="en-US" smtClean="0"/>
+              <a:t>28</a:t>
+            </a:fld>
+            <a:endParaRPr lang="en-US"/>
+          </a:p>
+        </p:txBody>
+      </p:sp>
+    </p:spTree>
+    <p:extLst>
+      <p:ext uri="{BB962C8B-B14F-4D97-AF65-F5344CB8AC3E}">
+        <p14:creationId xmlns:p14="http://schemas.microsoft.com/office/powerpoint/2010/main" val="2076017716"/>
       </p:ext>
     </p:extLst>
   </p:cSld>
@@ -3359,7 +5197,7 @@
           <p:cNvPr id="2" name="Title 1">
             <a:extLst>
               <a:ext uri="{FF2B5EF4-FFF2-40B4-BE49-F238E27FC236}">
-                <a16:creationId xmlns:a16="http://schemas.microsoft.com/office/drawing/2014/main" id="{E01BA7E6-FDB6-2DD9-6F3D-F8CDF694E8C8}"/>
+                <a16:creationId xmlns:a16="http://schemas.microsoft.com/office/drawing/2014/main" id="{13E0D4F4-56EF-F0A2-DABF-D2E0DDA1155F}"/>
               </a:ext>
             </a:extLst>
           </p:cNvPr>
@@ -3387,7 +5225,7 @@
           <p:cNvPr id="3" name="Content Placeholder 2">
             <a:extLst>
               <a:ext uri="{FF2B5EF4-FFF2-40B4-BE49-F238E27FC236}">
-                <a16:creationId xmlns:a16="http://schemas.microsoft.com/office/drawing/2014/main" id="{9B8714B7-B775-FCC0-BDC4-0D698338FF8A}"/>
+                <a16:creationId xmlns:a16="http://schemas.microsoft.com/office/drawing/2014/main" id="{4F257A74-6E54-A3C6-164F-19148FEF3388}"/>
               </a:ext>
             </a:extLst>
           </p:cNvPr>
@@ -3400,24 +5238,89 @@
         </p:nvSpPr>
         <p:spPr/>
         <p:txBody>
-          <a:bodyPr/>
-          <a:lstStyle/>
-          <a:p>
+          <a:bodyPr>
+            <a:normAutofit/>
+          </a:bodyPr>
+          <a:lstStyle/>
+          <a:p>
+            <a:r>
+              <a:rPr lang="en-US" sz="2000" dirty="0"/>
+              <a:t>Cartography is the intersection of </a:t>
+            </a:r>
+            <a:r>
+              <a:rPr lang="en-US" sz="2000" b="1" dirty="0"/>
+              <a:t>art</a:t>
+            </a:r>
+            <a:r>
+              <a:rPr lang="en-US" sz="2000" dirty="0"/>
+              <a:t>, </a:t>
+            </a:r>
+            <a:r>
+              <a:rPr lang="en-US" sz="2000" b="1" dirty="0"/>
+              <a:t>science</a:t>
+            </a:r>
+            <a:r>
+              <a:rPr lang="en-US" sz="2000" dirty="0"/>
+              <a:t>, and </a:t>
+            </a:r>
+            <a:r>
+              <a:rPr lang="en-US" sz="2000" b="1" dirty="0"/>
+              <a:t>technology</a:t>
+            </a:r>
+          </a:p>
+          <a:p>
+            <a:r>
+              <a:rPr lang="en-US" sz="2000" b="1" dirty="0"/>
+              <a:t>Goal</a:t>
+            </a:r>
+            <a:r>
+              <a:rPr lang="en-US" sz="2000" dirty="0"/>
+              <a:t>: To communicate complex spatial information clearly and accurately to a specific audience.</a:t>
+            </a:r>
+          </a:p>
+          <a:p>
+            <a:r>
+              <a:rPr lang="en-US" sz="2000" b="1" dirty="0"/>
+              <a:t>Key</a:t>
+            </a:r>
+            <a:r>
+              <a:rPr lang="en-US" sz="2000" dirty="0"/>
+              <a:t>: What is the story you want your map to tell?</a:t>
+            </a:r>
+          </a:p>
+          <a:p>
+            <a:pPr lvl="1"/>
+            <a:r>
+              <a:rPr lang="en-US" sz="2000" dirty="0"/>
+              <a:t>Design is not just "making it pretty" but about functional clarity.</a:t>
+            </a:r>
+          </a:p>
+          <a:p>
+            <a:pPr lvl="2"/>
             <a:r>
               <a:rPr lang="en-US" dirty="0"/>
-              <a:t>A satisfying and important aspect of geographic research is communicating the results.</a:t>
-            </a:r>
-          </a:p>
-          <a:p>
+              <a:t>Poorly designed maps can leave a bad impression.</a:t>
+            </a:r>
+          </a:p>
+          <a:p>
+            <a:pPr lvl="1"/>
             <a:r>
               <a:rPr lang="en-US" dirty="0"/>
-              <a:t>Map-making (the art of cartography) is an ancient skill involving communication, attention to detail, and an element of creativity.</a:t>
-            </a:r>
-          </a:p>
-          <a:p>
+              <a:t>Common design issues include:</a:t>
+            </a:r>
+          </a:p>
+          <a:p>
+            <a:pPr lvl="2"/>
             <a:r>
               <a:rPr lang="en-US" dirty="0"/>
-              <a:t>Static mapping in R is straightforward with the plot() function, as we saw.</a:t>
+              <a:t>Poor placement, size and readability of text,</a:t>
+            </a:r>
+          </a:p>
+          <a:p>
+            <a:pPr lvl="2"/>
+            <a:r>
+              <a:rPr lang="en-US" dirty="0"/>
+              <a:t>Careless selection of colors.</a:t>
             </a:r>
           </a:p>
         </p:txBody>
@@ -3427,7 +5330,7 @@
           <p:cNvPr id="4" name="Slide Number Placeholder 3">
             <a:extLst>
               <a:ext uri="{FF2B5EF4-FFF2-40B4-BE49-F238E27FC236}">
-                <a16:creationId xmlns:a16="http://schemas.microsoft.com/office/drawing/2014/main" id="{977222FB-DA6D-2756-74EE-F36E757FAD8B}"/>
+                <a16:creationId xmlns:a16="http://schemas.microsoft.com/office/drawing/2014/main" id="{9E65888D-A593-654D-089C-4B3A6249D528}"/>
               </a:ext>
             </a:extLst>
           </p:cNvPr>
@@ -3454,7 +5357,7 @@
     </p:spTree>
     <p:extLst>
       <p:ext uri="{BB962C8B-B14F-4D97-AF65-F5344CB8AC3E}">
-        <p14:creationId xmlns:p14="http://schemas.microsoft.com/office/powerpoint/2010/main" val="1921286045"/>
+        <p14:creationId xmlns:p14="http://schemas.microsoft.com/office/powerpoint/2010/main" val="2041093434"/>
       </p:ext>
     </p:extLst>
   </p:cSld>
@@ -3481,115 +5384,72 @@
           <a:chExt cx="0" cy="0"/>
         </a:xfrm>
       </p:grpSpPr>
-      <p:sp>
-        <p:nvSpPr>
-          <p:cNvPr id="2" name="Title 1">
-            <a:extLst>
-              <a:ext uri="{FF2B5EF4-FFF2-40B4-BE49-F238E27FC236}">
-                <a16:creationId xmlns:a16="http://schemas.microsoft.com/office/drawing/2014/main" id="{75594615-3E7A-9ACF-757D-C61D0993EE14}"/>
-              </a:ext>
-            </a:extLst>
-          </p:cNvPr>
-          <p:cNvSpPr>
-            <a:spLocks noGrp="1"/>
-          </p:cNvSpPr>
-          <p:nvPr>
-            <p:ph type="title"/>
-          </p:nvPr>
-        </p:nvSpPr>
-        <p:spPr/>
-        <p:txBody>
-          <a:bodyPr/>
-          <a:lstStyle/>
-          <a:p>
-            <a:endParaRPr lang="en-US"/>
-          </a:p>
-        </p:txBody>
-      </p:sp>
-      <p:sp>
-        <p:nvSpPr>
-          <p:cNvPr id="3" name="Content Placeholder 2">
-            <a:extLst>
-              <a:ext uri="{FF2B5EF4-FFF2-40B4-BE49-F238E27FC236}">
-                <a16:creationId xmlns:a16="http://schemas.microsoft.com/office/drawing/2014/main" id="{CEE143E4-07EA-D14A-1317-DA2ADDEF459E}"/>
-              </a:ext>
-            </a:extLst>
-          </p:cNvPr>
-          <p:cNvSpPr>
-            <a:spLocks noGrp="1"/>
-          </p:cNvSpPr>
-          <p:nvPr>
-            <p:ph idx="1"/>
-          </p:nvPr>
-        </p:nvSpPr>
-        <p:spPr/>
-        <p:txBody>
-          <a:bodyPr/>
-          <a:lstStyle/>
-          <a:p>
-            <a:r>
-              <a:rPr lang="en-US" dirty="0"/>
-              <a:t>The focus of this week, however, is cartography with dedicated map-making packages.</a:t>
-            </a:r>
-          </a:p>
-          <a:p>
-            <a:r>
-              <a:rPr lang="en-US" dirty="0"/>
-              <a:t>When learning a new skill, it makes sense to gain depth-of-knowledge in one area before branching out.</a:t>
-            </a:r>
-          </a:p>
-          <a:p>
-            <a:pPr lvl="1"/>
-            <a:r>
-              <a:rPr lang="en-US" dirty="0"/>
-              <a:t>Map-making is no exception.</a:t>
-            </a:r>
-          </a:p>
-          <a:p>
-            <a:r>
-              <a:rPr lang="en-US" dirty="0"/>
-              <a:t>A carefully crafted map can be the best way of communicating the results of your work.</a:t>
-            </a:r>
-          </a:p>
-          <a:p>
-            <a:pPr lvl="1"/>
-            <a:r>
-              <a:rPr lang="en-US" dirty="0"/>
-              <a:t>But poorly designed maps can leave a bad impression.</a:t>
-            </a:r>
-          </a:p>
-          <a:p>
-            <a:pPr lvl="1"/>
-            <a:r>
-              <a:rPr lang="en-US" dirty="0"/>
-              <a:t>Common design issues include:</a:t>
-            </a:r>
-          </a:p>
-          <a:p>
-            <a:pPr lvl="2"/>
-            <a:r>
-              <a:rPr lang="en-US" dirty="0"/>
-              <a:t>Poor placement, size and readability of text,</a:t>
-            </a:r>
-          </a:p>
-          <a:p>
-            <a:pPr lvl="2"/>
-            <a:r>
-              <a:rPr lang="en-US" dirty="0"/>
-              <a:t>Careless selection of colors.</a:t>
-            </a:r>
-          </a:p>
-          <a:p>
-            <a:endParaRPr lang="en-US" dirty="0"/>
-          </a:p>
-        </p:txBody>
-      </p:sp>
+      <p:pic>
+        <p:nvPicPr>
+          <p:cNvPr id="9" name="Picture 8">
+            <a:extLst>
+              <a:ext uri="{FF2B5EF4-FFF2-40B4-BE49-F238E27FC236}">
+                <a16:creationId xmlns:a16="http://schemas.microsoft.com/office/drawing/2014/main" id="{D0F6E13C-D359-2B6F-AF3F-016B2747B6CE}"/>
+              </a:ext>
+            </a:extLst>
+          </p:cNvPr>
+          <p:cNvPicPr>
+            <a:picLocks noChangeAspect="1"/>
+          </p:cNvPicPr>
+          <p:nvPr/>
+        </p:nvPicPr>
+        <p:blipFill>
+          <a:blip r:embed="rId2"/>
+          <a:stretch>
+            <a:fillRect/>
+          </a:stretch>
+        </p:blipFill>
+        <p:spPr>
+          <a:xfrm>
+            <a:off x="5248030" y="4674421"/>
+            <a:ext cx="3881917" cy="2183579"/>
+          </a:xfrm>
+          <a:prstGeom prst="rect">
+            <a:avLst/>
+          </a:prstGeom>
+        </p:spPr>
+      </p:pic>
+      <p:pic>
+        <p:nvPicPr>
+          <p:cNvPr id="12" name="Picture 11">
+            <a:extLst>
+              <a:ext uri="{FF2B5EF4-FFF2-40B4-BE49-F238E27FC236}">
+                <a16:creationId xmlns:a16="http://schemas.microsoft.com/office/drawing/2014/main" id="{9927796D-1377-DF07-109F-B49558B94C3E}"/>
+              </a:ext>
+            </a:extLst>
+          </p:cNvPr>
+          <p:cNvPicPr>
+            <a:picLocks noChangeAspect="1"/>
+          </p:cNvPicPr>
+          <p:nvPr/>
+        </p:nvPicPr>
+        <p:blipFill>
+          <a:blip r:embed="rId3"/>
+          <a:stretch>
+            <a:fillRect/>
+          </a:stretch>
+        </p:blipFill>
+        <p:spPr>
+          <a:xfrm>
+            <a:off x="2708613" y="4288607"/>
+            <a:ext cx="2539418" cy="2569394"/>
+          </a:xfrm>
+          <a:prstGeom prst="rect">
+            <a:avLst/>
+          </a:prstGeom>
+        </p:spPr>
+      </p:pic>
       <p:sp>
         <p:nvSpPr>
           <p:cNvPr id="4" name="Slide Number Placeholder 3">
             <a:extLst>
               <a:ext uri="{FF2B5EF4-FFF2-40B4-BE49-F238E27FC236}">
-                <a16:creationId xmlns:a16="http://schemas.microsoft.com/office/drawing/2014/main" id="{3BC66394-FC05-D7A7-428D-204B07259CFB}"/>
+                <a16:creationId xmlns:a16="http://schemas.microsoft.com/office/drawing/2014/main" id="{A67D9509-8192-D260-FED7-CF105870D3C3}"/>
               </a:ext>
             </a:extLst>
           </p:cNvPr>
@@ -3613,10 +5473,221 @@
           </a:p>
         </p:txBody>
       </p:sp>
+      <p:pic>
+        <p:nvPicPr>
+          <p:cNvPr id="5" name="Picture 4">
+            <a:extLst>
+              <a:ext uri="{FF2B5EF4-FFF2-40B4-BE49-F238E27FC236}">
+                <a16:creationId xmlns:a16="http://schemas.microsoft.com/office/drawing/2014/main" id="{685D303C-5D4F-83A1-5DAE-5CE9C10E2604}"/>
+              </a:ext>
+            </a:extLst>
+          </p:cNvPr>
+          <p:cNvPicPr>
+            <a:picLocks noChangeAspect="1"/>
+          </p:cNvPicPr>
+          <p:nvPr/>
+        </p:nvPicPr>
+        <p:blipFill>
+          <a:blip r:embed="rId4"/>
+          <a:stretch>
+            <a:fillRect/>
+          </a:stretch>
+        </p:blipFill>
+        <p:spPr>
+          <a:xfrm>
+            <a:off x="0" y="0"/>
+            <a:ext cx="3628417" cy="3117997"/>
+          </a:xfrm>
+          <a:prstGeom prst="rect">
+            <a:avLst/>
+          </a:prstGeom>
+        </p:spPr>
+      </p:pic>
+      <p:pic>
+        <p:nvPicPr>
+          <p:cNvPr id="6" name="Picture 5">
+            <a:extLst>
+              <a:ext uri="{FF2B5EF4-FFF2-40B4-BE49-F238E27FC236}">
+                <a16:creationId xmlns:a16="http://schemas.microsoft.com/office/drawing/2014/main" id="{5E555AC7-B4D3-567F-F7A0-044CA774970D}"/>
+              </a:ext>
+            </a:extLst>
+          </p:cNvPr>
+          <p:cNvPicPr>
+            <a:picLocks noChangeAspect="1"/>
+          </p:cNvPicPr>
+          <p:nvPr/>
+        </p:nvPicPr>
+        <p:blipFill>
+          <a:blip r:embed="rId5"/>
+          <a:stretch>
+            <a:fillRect/>
+          </a:stretch>
+        </p:blipFill>
+        <p:spPr>
+          <a:xfrm>
+            <a:off x="4301493" y="0"/>
+            <a:ext cx="4842507" cy="3061524"/>
+          </a:xfrm>
+          <a:prstGeom prst="rect">
+            <a:avLst/>
+          </a:prstGeom>
+        </p:spPr>
+      </p:pic>
+      <p:pic>
+        <p:nvPicPr>
+          <p:cNvPr id="7" name="Picture 6">
+            <a:extLst>
+              <a:ext uri="{FF2B5EF4-FFF2-40B4-BE49-F238E27FC236}">
+                <a16:creationId xmlns:a16="http://schemas.microsoft.com/office/drawing/2014/main" id="{0F974E36-FD82-2F54-1967-0F47D1980F8F}"/>
+              </a:ext>
+            </a:extLst>
+          </p:cNvPr>
+          <p:cNvPicPr>
+            <a:picLocks noChangeAspect="1"/>
+          </p:cNvPicPr>
+          <p:nvPr/>
+        </p:nvPicPr>
+        <p:blipFill>
+          <a:blip r:embed="rId6"/>
+          <a:srcRect r="9731"/>
+          <a:stretch>
+            <a:fillRect/>
+          </a:stretch>
+        </p:blipFill>
+        <p:spPr>
+          <a:xfrm>
+            <a:off x="3628417" y="0"/>
+            <a:ext cx="1980119" cy="2496141"/>
+          </a:xfrm>
+          <a:prstGeom prst="rect">
+            <a:avLst/>
+          </a:prstGeom>
+        </p:spPr>
+      </p:pic>
+      <p:pic>
+        <p:nvPicPr>
+          <p:cNvPr id="10" name="Picture 9">
+            <a:extLst>
+              <a:ext uri="{FF2B5EF4-FFF2-40B4-BE49-F238E27FC236}">
+                <a16:creationId xmlns:a16="http://schemas.microsoft.com/office/drawing/2014/main" id="{7FCA0154-4007-7EA8-928F-C053D6DA4E1E}"/>
+              </a:ext>
+            </a:extLst>
+          </p:cNvPr>
+          <p:cNvPicPr>
+            <a:picLocks noChangeAspect="1"/>
+          </p:cNvPicPr>
+          <p:nvPr/>
+        </p:nvPicPr>
+        <p:blipFill>
+          <a:blip r:embed="rId7"/>
+          <a:stretch>
+            <a:fillRect/>
+          </a:stretch>
+        </p:blipFill>
+        <p:spPr>
+          <a:xfrm>
+            <a:off x="5248029" y="3067061"/>
+            <a:ext cx="2644387" cy="1601823"/>
+          </a:xfrm>
+          <a:prstGeom prst="rect">
+            <a:avLst/>
+          </a:prstGeom>
+        </p:spPr>
+      </p:pic>
+      <p:pic>
+        <p:nvPicPr>
+          <p:cNvPr id="13" name="Picture 12">
+            <a:extLst>
+              <a:ext uri="{FF2B5EF4-FFF2-40B4-BE49-F238E27FC236}">
+                <a16:creationId xmlns:a16="http://schemas.microsoft.com/office/drawing/2014/main" id="{B0130F32-EC49-7C2F-017C-31FCCCD72C05}"/>
+              </a:ext>
+            </a:extLst>
+          </p:cNvPr>
+          <p:cNvPicPr>
+            <a:picLocks noChangeAspect="1"/>
+          </p:cNvPicPr>
+          <p:nvPr/>
+        </p:nvPicPr>
+        <p:blipFill>
+          <a:blip r:embed="rId8"/>
+          <a:stretch>
+            <a:fillRect/>
+          </a:stretch>
+        </p:blipFill>
+        <p:spPr>
+          <a:xfrm>
+            <a:off x="-1010" y="2531947"/>
+            <a:ext cx="2709623" cy="4326053"/>
+          </a:xfrm>
+          <a:prstGeom prst="rect">
+            <a:avLst/>
+          </a:prstGeom>
+        </p:spPr>
+      </p:pic>
+      <p:pic>
+        <p:nvPicPr>
+          <p:cNvPr id="8" name="Picture 7">
+            <a:extLst>
+              <a:ext uri="{FF2B5EF4-FFF2-40B4-BE49-F238E27FC236}">
+                <a16:creationId xmlns:a16="http://schemas.microsoft.com/office/drawing/2014/main" id="{899724AC-CB11-DCC0-0E05-D99F7F344146}"/>
+              </a:ext>
+            </a:extLst>
+          </p:cNvPr>
+          <p:cNvPicPr>
+            <a:picLocks noChangeAspect="1"/>
+          </p:cNvPicPr>
+          <p:nvPr/>
+        </p:nvPicPr>
+        <p:blipFill>
+          <a:blip r:embed="rId9"/>
+          <a:stretch>
+            <a:fillRect/>
+          </a:stretch>
+        </p:blipFill>
+        <p:spPr>
+          <a:xfrm>
+            <a:off x="2678294" y="1815636"/>
+            <a:ext cx="2588943" cy="2352046"/>
+          </a:xfrm>
+          <a:prstGeom prst="rect">
+            <a:avLst/>
+          </a:prstGeom>
+        </p:spPr>
+      </p:pic>
+      <p:pic>
+        <p:nvPicPr>
+          <p:cNvPr id="14" name="Picture 13">
+            <a:extLst>
+              <a:ext uri="{FF2B5EF4-FFF2-40B4-BE49-F238E27FC236}">
+                <a16:creationId xmlns:a16="http://schemas.microsoft.com/office/drawing/2014/main" id="{36AB0821-3792-1055-167A-5B12619FA16B}"/>
+              </a:ext>
+            </a:extLst>
+          </p:cNvPr>
+          <p:cNvPicPr>
+            <a:picLocks noChangeAspect="1"/>
+          </p:cNvPicPr>
+          <p:nvPr/>
+        </p:nvPicPr>
+        <p:blipFill>
+          <a:blip r:embed="rId10"/>
+          <a:stretch>
+            <a:fillRect/>
+          </a:stretch>
+        </p:blipFill>
+        <p:spPr>
+          <a:xfrm>
+            <a:off x="7873210" y="3443968"/>
+            <a:ext cx="1256737" cy="1256737"/>
+          </a:xfrm>
+          <a:prstGeom prst="rect">
+            <a:avLst/>
+          </a:prstGeom>
+        </p:spPr>
+      </p:pic>
     </p:spTree>
     <p:extLst>
       <p:ext uri="{BB962C8B-B14F-4D97-AF65-F5344CB8AC3E}">
-        <p14:creationId xmlns:p14="http://schemas.microsoft.com/office/powerpoint/2010/main" val="2532977750"/>
+        <p14:creationId xmlns:p14="http://schemas.microsoft.com/office/powerpoint/2010/main" val="2866823712"/>
       </p:ext>
     </p:extLst>
   </p:cSld>
@@ -3645,10 +5716,10 @@
       </p:grpSpPr>
       <p:sp>
         <p:nvSpPr>
-          <p:cNvPr id="2" name="Title 1">
-            <a:extLst>
-              <a:ext uri="{FF2B5EF4-FFF2-40B4-BE49-F238E27FC236}">
-                <a16:creationId xmlns:a16="http://schemas.microsoft.com/office/drawing/2014/main" id="{1A4CDC9E-2CBF-62CB-9EC0-C8C62B509E34}"/>
+          <p:cNvPr id="5" name="Title 4">
+            <a:extLst>
+              <a:ext uri="{FF2B5EF4-FFF2-40B4-BE49-F238E27FC236}">
+                <a16:creationId xmlns:a16="http://schemas.microsoft.com/office/drawing/2014/main" id="{137523D7-3FD0-2714-1E85-4D110673F4C9}"/>
               </a:ext>
             </a:extLst>
           </p:cNvPr>
@@ -3664,34 +5735,9 @@
           <a:bodyPr/>
           <a:lstStyle/>
           <a:p>
-            <a:endParaRPr lang="en-US" dirty="0"/>
-          </a:p>
-        </p:txBody>
-      </p:sp>
-      <p:sp>
-        <p:nvSpPr>
-          <p:cNvPr id="3" name="Content Placeholder 2">
-            <a:extLst>
-              <a:ext uri="{FF2B5EF4-FFF2-40B4-BE49-F238E27FC236}">
-                <a16:creationId xmlns:a16="http://schemas.microsoft.com/office/drawing/2014/main" id="{3E7F2494-6C21-BC7D-7A9D-1B6669F4B18F}"/>
-              </a:ext>
-            </a:extLst>
-          </p:cNvPr>
-          <p:cNvSpPr>
-            <a:spLocks noGrp="1"/>
-          </p:cNvSpPr>
-          <p:nvPr>
-            <p:ph idx="1"/>
-          </p:nvPr>
-        </p:nvSpPr>
-        <p:spPr/>
-        <p:txBody>
-          <a:bodyPr/>
-          <a:lstStyle/>
-          <a:p>
             <a:r>
               <a:rPr lang="en-US" dirty="0"/>
-              <a:t>How to simplify complex spatial datasets without losing integrity</a:t>
+              <a:t>Static maps</a:t>
             </a:r>
           </a:p>
         </p:txBody>
@@ -3701,7 +5747,7 @@
           <p:cNvPr id="4" name="Slide Number Placeholder 3">
             <a:extLst>
               <a:ext uri="{FF2B5EF4-FFF2-40B4-BE49-F238E27FC236}">
-                <a16:creationId xmlns:a16="http://schemas.microsoft.com/office/drawing/2014/main" id="{4E24AC5C-245A-7090-C545-EF078E47BEDF}"/>
+                <a16:creationId xmlns:a16="http://schemas.microsoft.com/office/drawing/2014/main" id="{971B4E3D-5C6C-3D1F-FC83-3C3D5EE29461}"/>
               </a:ext>
             </a:extLst>
           </p:cNvPr>
@@ -3728,7 +5774,7 @@
     </p:spTree>
     <p:extLst>
       <p:ext uri="{BB962C8B-B14F-4D97-AF65-F5344CB8AC3E}">
-        <p14:creationId xmlns:p14="http://schemas.microsoft.com/office/powerpoint/2010/main" val="3044556078"/>
+        <p14:creationId xmlns:p14="http://schemas.microsoft.com/office/powerpoint/2010/main" val="2329665257"/>
       </p:ext>
     </p:extLst>
   </p:cSld>
@@ -3743,7 +5789,13 @@
   <p:cSld>
     <p:spTree>
       <p:nvGrpSpPr>
-        <p:cNvPr id="1" name=""/>
+        <p:cNvPr id="1" name="">
+          <a:extLst>
+            <a:ext uri="{FF2B5EF4-FFF2-40B4-BE49-F238E27FC236}">
+              <a16:creationId xmlns:a16="http://schemas.microsoft.com/office/drawing/2014/main" id="{E91C45D2-751A-B7E4-B469-14AF57672F51}"/>
+            </a:ext>
+          </a:extLst>
+        </p:cNvPr>
         <p:cNvGrpSpPr/>
         <p:nvPr/>
       </p:nvGrpSpPr>
@@ -3757,38 +5809,10 @@
       </p:grpSpPr>
       <p:sp>
         <p:nvSpPr>
-          <p:cNvPr id="5" name="Title 4">
-            <a:extLst>
-              <a:ext uri="{FF2B5EF4-FFF2-40B4-BE49-F238E27FC236}">
-                <a16:creationId xmlns:a16="http://schemas.microsoft.com/office/drawing/2014/main" id="{137523D7-3FD0-2714-1E85-4D110673F4C9}"/>
-              </a:ext>
-            </a:extLst>
-          </p:cNvPr>
-          <p:cNvSpPr>
-            <a:spLocks noGrp="1"/>
-          </p:cNvSpPr>
-          <p:nvPr>
-            <p:ph type="title"/>
-          </p:nvPr>
-        </p:nvSpPr>
-        <p:spPr/>
-        <p:txBody>
-          <a:bodyPr/>
-          <a:lstStyle/>
-          <a:p>
-            <a:r>
-              <a:rPr lang="en-US" dirty="0"/>
-              <a:t>Static maps</a:t>
-            </a:r>
-          </a:p>
-        </p:txBody>
-      </p:sp>
-      <p:sp>
-        <p:nvSpPr>
           <p:cNvPr id="4" name="Slide Number Placeholder 3">
             <a:extLst>
               <a:ext uri="{FF2B5EF4-FFF2-40B4-BE49-F238E27FC236}">
-                <a16:creationId xmlns:a16="http://schemas.microsoft.com/office/drawing/2014/main" id="{971B4E3D-5C6C-3D1F-FC83-3C3D5EE29461}"/>
+                <a16:creationId xmlns:a16="http://schemas.microsoft.com/office/drawing/2014/main" id="{63CDD8FB-B825-6D59-0C3B-C880652E3B95}"/>
               </a:ext>
             </a:extLst>
           </p:cNvPr>
@@ -3812,10 +5836,99 @@
           </a:p>
         </p:txBody>
       </p:sp>
+      <p:pic>
+        <p:nvPicPr>
+          <p:cNvPr id="3" name="Picture 2">
+            <a:extLst>
+              <a:ext uri="{FF2B5EF4-FFF2-40B4-BE49-F238E27FC236}">
+                <a16:creationId xmlns:a16="http://schemas.microsoft.com/office/drawing/2014/main" id="{83BADF7A-F511-1CA1-9962-0AE99DF85434}"/>
+              </a:ext>
+            </a:extLst>
+          </p:cNvPr>
+          <p:cNvPicPr>
+            <a:picLocks noChangeAspect="1"/>
+          </p:cNvPicPr>
+          <p:nvPr/>
+        </p:nvPicPr>
+        <p:blipFill>
+          <a:blip r:embed="rId2"/>
+          <a:stretch>
+            <a:fillRect/>
+          </a:stretch>
+        </p:blipFill>
+        <p:spPr>
+          <a:xfrm>
+            <a:off x="457200" y="136524"/>
+            <a:ext cx="5326616" cy="4148783"/>
+          </a:xfrm>
+          <a:prstGeom prst="rect">
+            <a:avLst/>
+          </a:prstGeom>
+        </p:spPr>
+      </p:pic>
+      <p:sp>
+        <p:nvSpPr>
+          <p:cNvPr id="5" name="TextBox 4">
+            <a:extLst>
+              <a:ext uri="{FF2B5EF4-FFF2-40B4-BE49-F238E27FC236}">
+                <a16:creationId xmlns:a16="http://schemas.microsoft.com/office/drawing/2014/main" id="{EA9E751B-DB8C-8614-9C33-01402D188538}"/>
+              </a:ext>
+            </a:extLst>
+          </p:cNvPr>
+          <p:cNvSpPr txBox="1"/>
+          <p:nvPr/>
+        </p:nvSpPr>
+        <p:spPr>
+          <a:xfrm>
+            <a:off x="2830749" y="4048027"/>
+            <a:ext cx="5856051" cy="2308324"/>
+          </a:xfrm>
+          <a:prstGeom prst="rect">
+            <a:avLst/>
+          </a:prstGeom>
+          <a:noFill/>
+        </p:spPr>
+        <p:txBody>
+          <a:bodyPr wrap="square" rtlCol="0">
+            <a:spAutoFit/>
+          </a:bodyPr>
+          <a:lstStyle/>
+          <a:p>
+            <a:r>
+              <a:rPr lang="en-US" sz="1600" dirty="0"/>
+              <a:t>The map body map element is the </a:t>
+            </a:r>
+            <a:r>
+              <a:rPr lang="en-US" sz="1600" b="1" dirty="0"/>
+              <a:t>main focus </a:t>
+            </a:r>
+            <a:r>
+              <a:rPr lang="en-US" sz="1600" dirty="0"/>
+              <a:t>of the map and should be visually dominant in every case. The map body contains the features important to the message of the map. The map body should be made as large as possible on the medium but should also </a:t>
+            </a:r>
+            <a:r>
+              <a:rPr lang="en-US" sz="1600" u="sng" dirty="0"/>
+              <a:t>leave room for other map elements</a:t>
+            </a:r>
+            <a:r>
+              <a:rPr lang="en-US" sz="1600" dirty="0"/>
+              <a:t> and should not crowd the edges so that the map has a little "breathing room". The map body is the </a:t>
+            </a:r>
+            <a:r>
+              <a:rPr lang="en-US" sz="1600" u="sng" dirty="0"/>
+              <a:t>only map</a:t>
+            </a:r>
+            <a:r>
+              <a:rPr lang="en-US" sz="1600" dirty="0"/>
+              <a:t> element that is absolutely required when composing a map. However, the map is often much more useful when other map elements are included.</a:t>
+            </a:r>
+          </a:p>
+        </p:txBody>
+      </p:sp>
     </p:spTree>
     <p:extLst>
       <p:ext uri="{BB962C8B-B14F-4D97-AF65-F5344CB8AC3E}">
-        <p14:creationId xmlns:p14="http://schemas.microsoft.com/office/powerpoint/2010/main" val="2329665257"/>
+        <p14:creationId xmlns:p14="http://schemas.microsoft.com/office/powerpoint/2010/main" val="1111842384"/>
       </p:ext>
     </p:extLst>
   </p:cSld>
@@ -3844,60 +5957,10 @@
       </p:grpSpPr>
       <p:sp>
         <p:nvSpPr>
-          <p:cNvPr id="2" name="Title 1">
-            <a:extLst>
-              <a:ext uri="{FF2B5EF4-FFF2-40B4-BE49-F238E27FC236}">
-                <a16:creationId xmlns:a16="http://schemas.microsoft.com/office/drawing/2014/main" id="{20F45FB5-2A4E-82FF-054C-159B31C3F9A6}"/>
-              </a:ext>
-            </a:extLst>
-          </p:cNvPr>
-          <p:cNvSpPr>
-            <a:spLocks noGrp="1"/>
-          </p:cNvSpPr>
-          <p:nvPr>
-            <p:ph type="title"/>
-          </p:nvPr>
-        </p:nvSpPr>
-        <p:spPr/>
-        <p:txBody>
-          <a:bodyPr/>
-          <a:lstStyle/>
-          <a:p>
-            <a:endParaRPr lang="en-US"/>
-          </a:p>
-        </p:txBody>
-      </p:sp>
-      <p:sp>
-        <p:nvSpPr>
-          <p:cNvPr id="3" name="Content Placeholder 2">
-            <a:extLst>
-              <a:ext uri="{FF2B5EF4-FFF2-40B4-BE49-F238E27FC236}">
-                <a16:creationId xmlns:a16="http://schemas.microsoft.com/office/drawing/2014/main" id="{F0E2A95E-8B3D-F6E3-F3A4-A92D41FC6EF8}"/>
-              </a:ext>
-            </a:extLst>
-          </p:cNvPr>
-          <p:cNvSpPr>
-            <a:spLocks noGrp="1"/>
-          </p:cNvSpPr>
-          <p:nvPr>
-            <p:ph idx="1"/>
-          </p:nvPr>
-        </p:nvSpPr>
-        <p:spPr/>
-        <p:txBody>
-          <a:bodyPr/>
-          <a:lstStyle/>
-          <a:p>
-            <a:endParaRPr lang="en-US"/>
-          </a:p>
-        </p:txBody>
-      </p:sp>
-      <p:sp>
-        <p:nvSpPr>
           <p:cNvPr id="4" name="Slide Number Placeholder 3">
             <a:extLst>
               <a:ext uri="{FF2B5EF4-FFF2-40B4-BE49-F238E27FC236}">
-                <a16:creationId xmlns:a16="http://schemas.microsoft.com/office/drawing/2014/main" id="{015E8E2B-704B-9D42-F0E4-755195ECE135}"/>
+                <a16:creationId xmlns:a16="http://schemas.microsoft.com/office/drawing/2014/main" id="{21C61FF5-2E06-6CF1-43D2-43EA2C4D877E}"/>
               </a:ext>
             </a:extLst>
           </p:cNvPr>
@@ -3921,10 +5984,40 @@
           </a:p>
         </p:txBody>
       </p:sp>
+      <p:pic>
+        <p:nvPicPr>
+          <p:cNvPr id="6" name="Picture 5">
+            <a:extLst>
+              <a:ext uri="{FF2B5EF4-FFF2-40B4-BE49-F238E27FC236}">
+                <a16:creationId xmlns:a16="http://schemas.microsoft.com/office/drawing/2014/main" id="{E136811E-3B13-78C8-754F-8E9383C07ED7}"/>
+              </a:ext>
+            </a:extLst>
+          </p:cNvPr>
+          <p:cNvPicPr>
+            <a:picLocks noChangeAspect="1"/>
+          </p:cNvPicPr>
+          <p:nvPr/>
+        </p:nvPicPr>
+        <p:blipFill>
+          <a:blip r:embed="rId2"/>
+          <a:stretch>
+            <a:fillRect/>
+          </a:stretch>
+        </p:blipFill>
+        <p:spPr>
+          <a:xfrm>
+            <a:off x="2115000" y="0"/>
+            <a:ext cx="4914000" cy="6858000"/>
+          </a:xfrm>
+          <a:prstGeom prst="rect">
+            <a:avLst/>
+          </a:prstGeom>
+        </p:spPr>
+      </p:pic>
     </p:spTree>
     <p:extLst>
       <p:ext uri="{BB962C8B-B14F-4D97-AF65-F5344CB8AC3E}">
-        <p14:creationId xmlns:p14="http://schemas.microsoft.com/office/powerpoint/2010/main" val="564498531"/>
+        <p14:creationId xmlns:p14="http://schemas.microsoft.com/office/powerpoint/2010/main" val="1477719833"/>
       </p:ext>
     </p:extLst>
   </p:cSld>
@@ -3939,13 +6032,7 @@
   <p:cSld>
     <p:spTree>
       <p:nvGrpSpPr>
-        <p:cNvPr id="1" name="">
-          <a:extLst>
-            <a:ext uri="{FF2B5EF4-FFF2-40B4-BE49-F238E27FC236}">
-              <a16:creationId xmlns:a16="http://schemas.microsoft.com/office/drawing/2014/main" id="{984320E9-B191-430C-0C03-2CE73DB173CC}"/>
-            </a:ext>
-          </a:extLst>
-        </p:cNvPr>
+        <p:cNvPr id="1" name=""/>
         <p:cNvGrpSpPr/>
         <p:nvPr/>
       </p:nvGrpSpPr>
@@ -3959,10 +6046,10 @@
       </p:grpSpPr>
       <p:sp>
         <p:nvSpPr>
-          <p:cNvPr id="5" name="Title 4">
-            <a:extLst>
-              <a:ext uri="{FF2B5EF4-FFF2-40B4-BE49-F238E27FC236}">
-                <a16:creationId xmlns:a16="http://schemas.microsoft.com/office/drawing/2014/main" id="{FD6680E6-21FB-B9FC-B921-FB08AF5D8B57}"/>
+          <p:cNvPr id="2" name="Title 1">
+            <a:extLst>
+              <a:ext uri="{FF2B5EF4-FFF2-40B4-BE49-F238E27FC236}">
+                <a16:creationId xmlns:a16="http://schemas.microsoft.com/office/drawing/2014/main" id="{D0DD3631-D183-DD03-8E15-E1E2AF1F5603}"/>
               </a:ext>
             </a:extLst>
           </p:cNvPr>
@@ -3975,12 +6062,84 @@
         </p:nvSpPr>
         <p:spPr/>
         <p:txBody>
+          <a:bodyPr anchor="ctr">
+            <a:normAutofit/>
+          </a:bodyPr>
+          <a:lstStyle/>
+          <a:p>
+            <a:r>
+              <a:rPr lang="en-US" sz="2400" dirty="0"/>
+              <a:t>Map showing the elements that can be part of a map layout</a:t>
+            </a:r>
+          </a:p>
+        </p:txBody>
+      </p:sp>
+      <p:sp>
+        <p:nvSpPr>
+          <p:cNvPr id="3" name="Content Placeholder 2">
+            <a:extLst>
+              <a:ext uri="{FF2B5EF4-FFF2-40B4-BE49-F238E27FC236}">
+                <a16:creationId xmlns:a16="http://schemas.microsoft.com/office/drawing/2014/main" id="{42567BEF-554D-E278-F30F-6F4575C1680A}"/>
+              </a:ext>
+            </a:extLst>
+          </p:cNvPr>
+          <p:cNvSpPr>
+            <a:spLocks noGrp="1"/>
+          </p:cNvSpPr>
+          <p:nvPr>
+            <p:ph idx="1"/>
+          </p:nvPr>
+        </p:nvSpPr>
+        <p:spPr/>
+        <p:txBody>
           <a:bodyPr/>
           <a:lstStyle/>
           <a:p>
             <a:r>
               <a:rPr lang="en-US" dirty="0"/>
-              <a:t>Animated maps</a:t>
+              <a:t>data (or map) frame</a:t>
+            </a:r>
+          </a:p>
+          <a:p>
+            <a:r>
+              <a:rPr lang="en-US" dirty="0"/>
+              <a:t>map legend</a:t>
+            </a:r>
+          </a:p>
+          <a:p>
+            <a:r>
+              <a:rPr lang="en-US" dirty="0"/>
+              <a:t>map title</a:t>
+            </a:r>
+          </a:p>
+          <a:p>
+            <a:r>
+              <a:rPr lang="en-US" dirty="0"/>
+              <a:t>north arrow</a:t>
+            </a:r>
+          </a:p>
+          <a:p>
+            <a:r>
+              <a:rPr lang="en-US" dirty="0"/>
+              <a:t>map scale bar</a:t>
+            </a:r>
+          </a:p>
+          <a:p>
+            <a:r>
+              <a:rPr lang="en-US" dirty="0"/>
+              <a:t>metadata (or map citation)</a:t>
+            </a:r>
+          </a:p>
+          <a:p>
+            <a:r>
+              <a:rPr lang="en-US" dirty="0"/>
+              <a:t>border</a:t>
+            </a:r>
+          </a:p>
+          <a:p>
+            <a:r>
+              <a:rPr lang="en-US" dirty="0"/>
+              <a:t>inset (or locator) map</a:t>
             </a:r>
           </a:p>
         </p:txBody>
@@ -3990,7 +6149,7 @@
           <p:cNvPr id="4" name="Slide Number Placeholder 3">
             <a:extLst>
               <a:ext uri="{FF2B5EF4-FFF2-40B4-BE49-F238E27FC236}">
-                <a16:creationId xmlns:a16="http://schemas.microsoft.com/office/drawing/2014/main" id="{FAE202AD-F5C4-00F7-743A-FA6ECFBC4A76}"/>
+                <a16:creationId xmlns:a16="http://schemas.microsoft.com/office/drawing/2014/main" id="{80F46A77-44DF-551A-E333-477297E75D7F}"/>
               </a:ext>
             </a:extLst>
           </p:cNvPr>
@@ -4014,10 +6173,40 @@
           </a:p>
         </p:txBody>
       </p:sp>
+      <p:pic>
+        <p:nvPicPr>
+          <p:cNvPr id="7" name="Picture 6">
+            <a:extLst>
+              <a:ext uri="{FF2B5EF4-FFF2-40B4-BE49-F238E27FC236}">
+                <a16:creationId xmlns:a16="http://schemas.microsoft.com/office/drawing/2014/main" id="{A7EDA5AE-B05D-A15E-13D8-26C7E18EBB69}"/>
+              </a:ext>
+            </a:extLst>
+          </p:cNvPr>
+          <p:cNvPicPr>
+            <a:picLocks noChangeAspect="1"/>
+          </p:cNvPicPr>
+          <p:nvPr/>
+        </p:nvPicPr>
+        <p:blipFill>
+          <a:blip r:embed="rId2"/>
+          <a:stretch>
+            <a:fillRect/>
+          </a:stretch>
+        </p:blipFill>
+        <p:spPr>
+          <a:xfrm>
+            <a:off x="4036980" y="1416683"/>
+            <a:ext cx="4649820" cy="4565981"/>
+          </a:xfrm>
+          <a:prstGeom prst="rect">
+            <a:avLst/>
+          </a:prstGeom>
+        </p:spPr>
+      </p:pic>
     </p:spTree>
     <p:extLst>
       <p:ext uri="{BB962C8B-B14F-4D97-AF65-F5344CB8AC3E}">
-        <p14:creationId xmlns:p14="http://schemas.microsoft.com/office/powerpoint/2010/main" val="2932111394"/>
+        <p14:creationId xmlns:p14="http://schemas.microsoft.com/office/powerpoint/2010/main" val="1476805087"/>
       </p:ext>
     </p:extLst>
   </p:cSld>
@@ -4032,13 +6221,7 @@
   <p:cSld>
     <p:spTree>
       <p:nvGrpSpPr>
-        <p:cNvPr id="1" name="">
-          <a:extLst>
-            <a:ext uri="{FF2B5EF4-FFF2-40B4-BE49-F238E27FC236}">
-              <a16:creationId xmlns:a16="http://schemas.microsoft.com/office/drawing/2014/main" id="{DAABE119-69AC-2958-CE32-2C414B4DEB3C}"/>
-            </a:ext>
-          </a:extLst>
-        </p:cNvPr>
+        <p:cNvPr id="1" name=""/>
         <p:cNvGrpSpPr/>
         <p:nvPr/>
       </p:nvGrpSpPr>
@@ -4055,7 +6238,7 @@
           <p:cNvPr id="2" name="Title 1">
             <a:extLst>
               <a:ext uri="{FF2B5EF4-FFF2-40B4-BE49-F238E27FC236}">
-                <a16:creationId xmlns:a16="http://schemas.microsoft.com/office/drawing/2014/main" id="{9E0ED7C4-A5EA-C3C4-91E9-186BC945AB8A}"/>
+                <a16:creationId xmlns:a16="http://schemas.microsoft.com/office/drawing/2014/main" id="{BCDA531D-6E47-EF6E-7DAA-4EDC3EFFD171}"/>
               </a:ext>
             </a:extLst>
           </p:cNvPr>
@@ -4068,44 +6251,51 @@
         </p:nvSpPr>
         <p:spPr/>
         <p:txBody>
-          <a:bodyPr/>
-          <a:lstStyle/>
-          <a:p>
-            <a:endParaRPr lang="en-US"/>
-          </a:p>
-        </p:txBody>
-      </p:sp>
-      <p:sp>
-        <p:nvSpPr>
-          <p:cNvPr id="3" name="Content Placeholder 2">
-            <a:extLst>
-              <a:ext uri="{FF2B5EF4-FFF2-40B4-BE49-F238E27FC236}">
-                <a16:creationId xmlns:a16="http://schemas.microsoft.com/office/drawing/2014/main" id="{47331457-74FC-5DB0-4CD9-FAEAD5F7FEC5}"/>
-              </a:ext>
-            </a:extLst>
-          </p:cNvPr>
-          <p:cNvSpPr>
-            <a:spLocks noGrp="1"/>
-          </p:cNvSpPr>
+          <a:bodyPr anchor="ctr"/>
+          <a:lstStyle/>
+          <a:p>
+            <a:r>
+              <a:rPr lang="en-US" dirty="0"/>
+              <a:t>A General Reference Map</a:t>
+            </a:r>
+          </a:p>
+        </p:txBody>
+      </p:sp>
+      <p:pic>
+        <p:nvPicPr>
+          <p:cNvPr id="5" name="Content Placeholder 4">
+            <a:extLst>
+              <a:ext uri="{FF2B5EF4-FFF2-40B4-BE49-F238E27FC236}">
+                <a16:creationId xmlns:a16="http://schemas.microsoft.com/office/drawing/2014/main" id="{F5EE0869-791C-54BD-2F64-FF12E51E23CE}"/>
+              </a:ext>
+            </a:extLst>
+          </p:cNvPr>
+          <p:cNvPicPr>
+            <a:picLocks noGrp="1" noChangeAspect="1"/>
+          </p:cNvPicPr>
           <p:nvPr>
             <p:ph idx="1"/>
           </p:nvPr>
-        </p:nvSpPr>
-        <p:spPr/>
-        <p:txBody>
-          <a:bodyPr/>
-          <a:lstStyle/>
-          <a:p>
-            <a:endParaRPr lang="en-US"/>
-          </a:p>
-        </p:txBody>
-      </p:sp>
+        </p:nvPicPr>
+        <p:blipFill>
+          <a:blip r:embed="rId2"/>
+          <a:stretch>
+            <a:fillRect/>
+          </a:stretch>
+        </p:blipFill>
+        <p:spPr>
+          <a:xfrm>
+            <a:off x="1879600" y="1170420"/>
+            <a:ext cx="5384800" cy="4038600"/>
+          </a:xfrm>
+        </p:spPr>
+      </p:pic>
       <p:sp>
         <p:nvSpPr>
           <p:cNvPr id="4" name="Slide Number Placeholder 3">
             <a:extLst>
               <a:ext uri="{FF2B5EF4-FFF2-40B4-BE49-F238E27FC236}">
-                <a16:creationId xmlns:a16="http://schemas.microsoft.com/office/drawing/2014/main" id="{0152F613-5612-6D1C-A596-EF36633EBB5B}"/>
+                <a16:creationId xmlns:a16="http://schemas.microsoft.com/office/drawing/2014/main" id="{317BD18B-3358-4EA8-2F98-E7E33BCEC141}"/>
               </a:ext>
             </a:extLst>
           </p:cNvPr>
@@ -4129,10 +6319,53 @@
           </a:p>
         </p:txBody>
       </p:sp>
+      <p:sp>
+        <p:nvSpPr>
+          <p:cNvPr id="6" name="TextBox 5">
+            <a:extLst>
+              <a:ext uri="{FF2B5EF4-FFF2-40B4-BE49-F238E27FC236}">
+                <a16:creationId xmlns:a16="http://schemas.microsoft.com/office/drawing/2014/main" id="{B79D2806-011C-4E98-0568-A8E02211ED21}"/>
+              </a:ext>
+            </a:extLst>
+          </p:cNvPr>
+          <p:cNvSpPr txBox="1"/>
+          <p:nvPr/>
+        </p:nvSpPr>
+        <p:spPr>
+          <a:xfrm>
+            <a:off x="457200" y="5305632"/>
+            <a:ext cx="8229599" cy="954107"/>
+          </a:xfrm>
+          <a:prstGeom prst="rect">
+            <a:avLst/>
+          </a:prstGeom>
+          <a:noFill/>
+        </p:spPr>
+        <p:txBody>
+          <a:bodyPr wrap="square" rtlCol="0">
+            <a:spAutoFit/>
+          </a:bodyPr>
+          <a:lstStyle/>
+          <a:p>
+            <a:r>
+              <a:rPr lang="en-US" sz="1400" dirty="0"/>
+              <a:t>This map legend has two columns of information that are roughly equal in size. Each map feature is identified with a symbol that is identical to the symbol found on the map followed by the name of the map feature to the right of the symbol. On this general reference map legend common features such as lakes, parks, rivers, railroads, and roads are included, where they </a:t>
+            </a:r>
+            <a:r>
+              <a:rPr lang="en-US" sz="1400" u="sng" dirty="0"/>
+              <a:t>may not be included on thematic maps</a:t>
+            </a:r>
+            <a:r>
+              <a:rPr lang="en-US" sz="1400" dirty="0"/>
+              <a:t>.</a:t>
+            </a:r>
+          </a:p>
+        </p:txBody>
+      </p:sp>
     </p:spTree>
     <p:extLst>
       <p:ext uri="{BB962C8B-B14F-4D97-AF65-F5344CB8AC3E}">
-        <p14:creationId xmlns:p14="http://schemas.microsoft.com/office/powerpoint/2010/main" val="385475354"/>
+        <p14:creationId xmlns:p14="http://schemas.microsoft.com/office/powerpoint/2010/main" val="2984081995"/>
       </p:ext>
     </p:extLst>
   </p:cSld>
